--- a/Data Mining and Analytics -21CSE355T/Unit-5/PPT/Data_Mining_approaches.pptx
+++ b/Data Mining and Analytics -21CSE355T/Unit-5/PPT/Data_Mining_approaches.pptx
@@ -76,25 +76,7 @@
                 </a:solidFill>
                 <a:latin typeface="Arial"/>
               </a:rPr>
-              <a:t>Click to </a:t>
-            </a:r>
-            <a:r>
-              <a:rPr b="0" lang="en-US" sz="4400" spc="-1" strike="noStrike">
-                <a:solidFill>
-                  <a:srgbClr val="000000"/>
-                </a:solidFill>
-                <a:latin typeface="Arial"/>
-              </a:rPr>
-              <a:t>move the </a:t>
-            </a:r>
-            <a:r>
-              <a:rPr b="0" lang="en-US" sz="4400" spc="-1" strike="noStrike">
-                <a:solidFill>
-                  <a:srgbClr val="000000"/>
-                </a:solidFill>
-                <a:latin typeface="Arial"/>
-              </a:rPr>
-              <a:t>slide</a:t>
+              <a:t>Click to move the slide</a:t>
             </a:r>
             <a:endParaRPr b="0" lang="en-US" sz="4400" spc="-1" strike="noStrike">
               <a:solidFill>
@@ -143,7 +125,7 @@
                 </a:solidFill>
                 <a:latin typeface="Arial"/>
               </a:rPr>
-              <a:t>Cli</a:t>
+              <a:t>Click to edit the </a:t>
             </a:r>
             <a:r>
               <a:rPr b="0" lang="en-US" sz="2000" spc="-1" strike="noStrike">
@@ -152,232 +134,7 @@
                 </a:solidFill>
                 <a:latin typeface="Arial"/>
               </a:rPr>
-              <a:t>c</a:t>
-            </a:r>
-            <a:r>
-              <a:rPr b="0" lang="en-US" sz="2000" spc="-1" strike="noStrike">
-                <a:solidFill>
-                  <a:srgbClr val="000000"/>
-                </a:solidFill>
-                <a:latin typeface="Arial"/>
-              </a:rPr>
-              <a:t>k</a:t>
-            </a:r>
-            <a:r>
-              <a:rPr b="0" lang="en-US" sz="2000" spc="-1" strike="noStrike">
-                <a:solidFill>
-                  <a:srgbClr val="000000"/>
-                </a:solidFill>
-                <a:latin typeface="Arial"/>
-              </a:rPr>
-              <a:t> </a:t>
-            </a:r>
-            <a:r>
-              <a:rPr b="0" lang="en-US" sz="2000" spc="-1" strike="noStrike">
-                <a:solidFill>
-                  <a:srgbClr val="000000"/>
-                </a:solidFill>
-                <a:latin typeface="Arial"/>
-              </a:rPr>
-              <a:t>t</a:t>
-            </a:r>
-            <a:r>
-              <a:rPr b="0" lang="en-US" sz="2000" spc="-1" strike="noStrike">
-                <a:solidFill>
-                  <a:srgbClr val="000000"/>
-                </a:solidFill>
-                <a:latin typeface="Arial"/>
-              </a:rPr>
-              <a:t>o</a:t>
-            </a:r>
-            <a:r>
-              <a:rPr b="0" lang="en-US" sz="2000" spc="-1" strike="noStrike">
-                <a:solidFill>
-                  <a:srgbClr val="000000"/>
-                </a:solidFill>
-                <a:latin typeface="Arial"/>
-              </a:rPr>
-              <a:t> </a:t>
-            </a:r>
-            <a:r>
-              <a:rPr b="0" lang="en-US" sz="2000" spc="-1" strike="noStrike">
-                <a:solidFill>
-                  <a:srgbClr val="000000"/>
-                </a:solidFill>
-                <a:latin typeface="Arial"/>
-              </a:rPr>
-              <a:t>e</a:t>
-            </a:r>
-            <a:r>
-              <a:rPr b="0" lang="en-US" sz="2000" spc="-1" strike="noStrike">
-                <a:solidFill>
-                  <a:srgbClr val="000000"/>
-                </a:solidFill>
-                <a:latin typeface="Arial"/>
-              </a:rPr>
-              <a:t>d</a:t>
-            </a:r>
-            <a:r>
-              <a:rPr b="0" lang="en-US" sz="2000" spc="-1" strike="noStrike">
-                <a:solidFill>
-                  <a:srgbClr val="000000"/>
-                </a:solidFill>
-                <a:latin typeface="Arial"/>
-              </a:rPr>
-              <a:t>i</a:t>
-            </a:r>
-            <a:r>
-              <a:rPr b="0" lang="en-US" sz="2000" spc="-1" strike="noStrike">
-                <a:solidFill>
-                  <a:srgbClr val="000000"/>
-                </a:solidFill>
-                <a:latin typeface="Arial"/>
-              </a:rPr>
-              <a:t>t </a:t>
-            </a:r>
-            <a:r>
-              <a:rPr b="0" lang="en-US" sz="2000" spc="-1" strike="noStrike">
-                <a:solidFill>
-                  <a:srgbClr val="000000"/>
-                </a:solidFill>
-                <a:latin typeface="Arial"/>
-              </a:rPr>
-              <a:t>t</a:t>
-            </a:r>
-            <a:r>
-              <a:rPr b="0" lang="en-US" sz="2000" spc="-1" strike="noStrike">
-                <a:solidFill>
-                  <a:srgbClr val="000000"/>
-                </a:solidFill>
-                <a:latin typeface="Arial"/>
-              </a:rPr>
-              <a:t>h</a:t>
-            </a:r>
-            <a:r>
-              <a:rPr b="0" lang="en-US" sz="2000" spc="-1" strike="noStrike">
-                <a:solidFill>
-                  <a:srgbClr val="000000"/>
-                </a:solidFill>
-                <a:latin typeface="Arial"/>
-              </a:rPr>
-              <a:t>e</a:t>
-            </a:r>
-            <a:r>
-              <a:rPr b="0" lang="en-US" sz="2000" spc="-1" strike="noStrike">
-                <a:solidFill>
-                  <a:srgbClr val="000000"/>
-                </a:solidFill>
-                <a:latin typeface="Arial"/>
-              </a:rPr>
-              <a:t> </a:t>
-            </a:r>
-            <a:r>
-              <a:rPr b="0" lang="en-US" sz="2000" spc="-1" strike="noStrike">
-                <a:solidFill>
-                  <a:srgbClr val="000000"/>
-                </a:solidFill>
-                <a:latin typeface="Arial"/>
-              </a:rPr>
-              <a:t>n</a:t>
-            </a:r>
-            <a:r>
-              <a:rPr b="0" lang="en-US" sz="2000" spc="-1" strike="noStrike">
-                <a:solidFill>
-                  <a:srgbClr val="000000"/>
-                </a:solidFill>
-                <a:latin typeface="Arial"/>
-              </a:rPr>
-              <a:t>o</a:t>
-            </a:r>
-            <a:r>
-              <a:rPr b="0" lang="en-US" sz="2000" spc="-1" strike="noStrike">
-                <a:solidFill>
-                  <a:srgbClr val="000000"/>
-                </a:solidFill>
-                <a:latin typeface="Arial"/>
-              </a:rPr>
-              <a:t>t</a:t>
-            </a:r>
-            <a:r>
-              <a:rPr b="0" lang="en-US" sz="2000" spc="-1" strike="noStrike">
-                <a:solidFill>
-                  <a:srgbClr val="000000"/>
-                </a:solidFill>
-                <a:latin typeface="Arial"/>
-              </a:rPr>
-              <a:t>e</a:t>
-            </a:r>
-            <a:r>
-              <a:rPr b="0" lang="en-US" sz="2000" spc="-1" strike="noStrike">
-                <a:solidFill>
-                  <a:srgbClr val="000000"/>
-                </a:solidFill>
-                <a:latin typeface="Arial"/>
-              </a:rPr>
-              <a:t>s</a:t>
-            </a:r>
-            <a:r>
-              <a:rPr b="0" lang="en-US" sz="2000" spc="-1" strike="noStrike">
-                <a:solidFill>
-                  <a:srgbClr val="000000"/>
-                </a:solidFill>
-                <a:latin typeface="Arial"/>
-              </a:rPr>
-              <a:t> </a:t>
-            </a:r>
-            <a:r>
-              <a:rPr b="0" lang="en-US" sz="2000" spc="-1" strike="noStrike">
-                <a:solidFill>
-                  <a:srgbClr val="000000"/>
-                </a:solidFill>
-                <a:latin typeface="Arial"/>
-              </a:rPr>
-              <a:t>f</a:t>
-            </a:r>
-            <a:r>
-              <a:rPr b="0" lang="en-US" sz="2000" spc="-1" strike="noStrike">
-                <a:solidFill>
-                  <a:srgbClr val="000000"/>
-                </a:solidFill>
-                <a:latin typeface="Arial"/>
-              </a:rPr>
-              <a:t>o</a:t>
-            </a:r>
-            <a:r>
-              <a:rPr b="0" lang="en-US" sz="2000" spc="-1" strike="noStrike">
-                <a:solidFill>
-                  <a:srgbClr val="000000"/>
-                </a:solidFill>
-                <a:latin typeface="Arial"/>
-              </a:rPr>
-              <a:t>r</a:t>
-            </a:r>
-            <a:r>
-              <a:rPr b="0" lang="en-US" sz="2000" spc="-1" strike="noStrike">
-                <a:solidFill>
-                  <a:srgbClr val="000000"/>
-                </a:solidFill>
-                <a:latin typeface="Arial"/>
-              </a:rPr>
-              <a:t>m</a:t>
-            </a:r>
-            <a:r>
-              <a:rPr b="0" lang="en-US" sz="2000" spc="-1" strike="noStrike">
-                <a:solidFill>
-                  <a:srgbClr val="000000"/>
-                </a:solidFill>
-                <a:latin typeface="Arial"/>
-              </a:rPr>
-              <a:t>a</a:t>
-            </a:r>
-            <a:r>
-              <a:rPr b="0" lang="en-US" sz="2000" spc="-1" strike="noStrike">
-                <a:solidFill>
-                  <a:srgbClr val="000000"/>
-                </a:solidFill>
-                <a:latin typeface="Arial"/>
-              </a:rPr>
-              <a:t>t</a:t>
+              <a:t>notes format</a:t>
             </a:r>
             <a:endParaRPr b="0" lang="en-US" sz="2000" spc="-1" strike="noStrike">
               <a:solidFill>
@@ -599,7 +356,7 @@
             <a:pPr indent="0" algn="r">
               <a:buNone/>
             </a:pPr>
-            <a:fld id="{6A2F947E-0743-4E2A-9F80-F9B7C64DFA81}" type="slidenum">
+            <a:fld id="{8A7F89D0-60B7-41CC-84CF-A75CE4BBDEDE}" type="slidenum">
               <a:rPr b="0" lang="en-US" sz="1400" spc="-1" strike="noStrike">
                 <a:solidFill>
                   <a:srgbClr val="000000"/>
@@ -653,7 +410,7 @@
         <p:spPr>
           <a:xfrm>
             <a:off x="685800" y="1143000"/>
-            <a:ext cx="5485680" cy="3085560"/>
+            <a:ext cx="5485320" cy="3085200"/>
           </a:xfrm>
           <a:prstGeom prst="rect">
             <a:avLst/>
@@ -676,7 +433,7 @@
         <p:spPr>
           <a:xfrm>
             <a:off x="685800" y="4400640"/>
-            <a:ext cx="5485680" cy="3599640"/>
+            <a:ext cx="5485320" cy="3599280"/>
           </a:xfrm>
           <a:prstGeom prst="rect">
             <a:avLst/>
@@ -716,7 +473,7 @@
         <p:spPr>
           <a:xfrm>
             <a:off x="3884760" y="8685360"/>
-            <a:ext cx="2971080" cy="457920"/>
+            <a:ext cx="2970720" cy="457560"/>
           </a:xfrm>
           <a:prstGeom prst="rect">
             <a:avLst/>
@@ -758,7 +515,7 @@
                 <a:tab algn="l" pos="0"/>
               </a:tabLst>
             </a:pPr>
-            <a:fld id="{C5A688CD-714E-42B0-A8B4-E35EA06A8F56}" type="slidenum">
+            <a:fld id="{1564A601-F2B9-4185-9673-1D0D4AC28101}" type="slidenum">
               <a:rPr b="0" lang="en-US" sz="1200" spc="-1" strike="noStrike">
                 <a:solidFill>
                   <a:schemeClr val="dk1"/>
@@ -812,7 +569,7 @@
         <p:spPr>
           <a:xfrm>
             <a:off x="685800" y="1143000"/>
-            <a:ext cx="5485680" cy="3085560"/>
+            <a:ext cx="5485320" cy="3085200"/>
           </a:xfrm>
           <a:prstGeom prst="rect">
             <a:avLst/>
@@ -835,7 +592,7 @@
         <p:spPr>
           <a:xfrm>
             <a:off x="685800" y="4400640"/>
-            <a:ext cx="5485680" cy="3599640"/>
+            <a:ext cx="5485320" cy="3599280"/>
           </a:xfrm>
           <a:prstGeom prst="rect">
             <a:avLst/>
@@ -875,7 +632,7 @@
         <p:spPr>
           <a:xfrm>
             <a:off x="3884760" y="8685360"/>
-            <a:ext cx="2971080" cy="457920"/>
+            <a:ext cx="2970720" cy="457560"/>
           </a:xfrm>
           <a:prstGeom prst="rect">
             <a:avLst/>
@@ -917,7 +674,7 @@
                 <a:tab algn="l" pos="0"/>
               </a:tabLst>
             </a:pPr>
-            <a:fld id="{4342B6E5-7122-47A7-B0EF-63777AFB8807}" type="slidenum">
+            <a:fld id="{579A9D08-B73E-4809-BEA8-DABEA1A9375F}" type="slidenum">
               <a:rPr b="0" lang="en-US" sz="1200" spc="-1" strike="noStrike">
                 <a:solidFill>
                   <a:schemeClr val="dk1"/>
@@ -971,7 +728,7 @@
         <p:spPr>
           <a:xfrm>
             <a:off x="685800" y="1143000"/>
-            <a:ext cx="5485680" cy="3085560"/>
+            <a:ext cx="5485320" cy="3085200"/>
           </a:xfrm>
           <a:prstGeom prst="rect">
             <a:avLst/>
@@ -994,7 +751,7 @@
         <p:spPr>
           <a:xfrm>
             <a:off x="685800" y="4400640"/>
-            <a:ext cx="5485680" cy="3599640"/>
+            <a:ext cx="5485320" cy="3599280"/>
           </a:xfrm>
           <a:prstGeom prst="rect">
             <a:avLst/>
@@ -1034,7 +791,7 @@
         <p:spPr>
           <a:xfrm>
             <a:off x="3884760" y="8685360"/>
-            <a:ext cx="2971080" cy="457920"/>
+            <a:ext cx="2970720" cy="457560"/>
           </a:xfrm>
           <a:prstGeom prst="rect">
             <a:avLst/>
@@ -1076,7 +833,7 @@
                 <a:tab algn="l" pos="0"/>
               </a:tabLst>
             </a:pPr>
-            <a:fld id="{F06B80AB-0358-4ABA-8ACB-DEC2661E4456}" type="slidenum">
+            <a:fld id="{EDA26A53-CA1F-4AFE-9BAD-86440706FE4A}" type="slidenum">
               <a:rPr b="0" lang="en-US" sz="1200" spc="-1" strike="noStrike">
                 <a:solidFill>
                   <a:schemeClr val="dk1"/>
@@ -1130,7 +887,7 @@
         <p:spPr>
           <a:xfrm>
             <a:off x="685800" y="1143000"/>
-            <a:ext cx="5485680" cy="3085560"/>
+            <a:ext cx="5485320" cy="3085200"/>
           </a:xfrm>
           <a:prstGeom prst="rect">
             <a:avLst/>
@@ -1153,7 +910,7 @@
         <p:spPr>
           <a:xfrm>
             <a:off x="685800" y="4400640"/>
-            <a:ext cx="5485680" cy="3599640"/>
+            <a:ext cx="5485320" cy="3599280"/>
           </a:xfrm>
           <a:prstGeom prst="rect">
             <a:avLst/>
@@ -1193,7 +950,7 @@
         <p:spPr>
           <a:xfrm>
             <a:off x="3884760" y="8685360"/>
-            <a:ext cx="2971080" cy="457920"/>
+            <a:ext cx="2970720" cy="457560"/>
           </a:xfrm>
           <a:prstGeom prst="rect">
             <a:avLst/>
@@ -1235,7 +992,7 @@
                 <a:tab algn="l" pos="0"/>
               </a:tabLst>
             </a:pPr>
-            <a:fld id="{7548F40C-DF6B-41B9-AA3F-F9A5C800DE59}" type="slidenum">
+            <a:fld id="{A570320B-DBE1-4162-B8AC-7A8353D4878D}" type="slidenum">
               <a:rPr b="0" lang="en-US" sz="1200" spc="-1" strike="noStrike">
                 <a:solidFill>
                   <a:schemeClr val="dk1"/>
@@ -1289,7 +1046,7 @@
         <p:spPr>
           <a:xfrm>
             <a:off x="685800" y="1143000"/>
-            <a:ext cx="5485680" cy="3085560"/>
+            <a:ext cx="5485320" cy="3085200"/>
           </a:xfrm>
           <a:prstGeom prst="rect">
             <a:avLst/>
@@ -1312,7 +1069,7 @@
         <p:spPr>
           <a:xfrm>
             <a:off x="685800" y="4400640"/>
-            <a:ext cx="5485680" cy="3599640"/>
+            <a:ext cx="5485320" cy="3599280"/>
           </a:xfrm>
           <a:prstGeom prst="rect">
             <a:avLst/>
@@ -1352,7 +1109,7 @@
         <p:spPr>
           <a:xfrm>
             <a:off x="3884760" y="8685360"/>
-            <a:ext cx="2971080" cy="457920"/>
+            <a:ext cx="2970720" cy="457560"/>
           </a:xfrm>
           <a:prstGeom prst="rect">
             <a:avLst/>
@@ -1394,7 +1151,7 @@
                 <a:tab algn="l" pos="0"/>
               </a:tabLst>
             </a:pPr>
-            <a:fld id="{654F07D3-EF7D-4CF0-B30E-4FF17AC4A29F}" type="slidenum">
+            <a:fld id="{587F1176-4363-42FA-99D7-04FDBB14B16B}" type="slidenum">
               <a:rPr b="0" lang="en-US" sz="1200" spc="-1" strike="noStrike">
                 <a:solidFill>
                   <a:schemeClr val="dk1"/>
@@ -1448,7 +1205,7 @@
         <p:spPr>
           <a:xfrm>
             <a:off x="685800" y="1143000"/>
-            <a:ext cx="5485680" cy="3085560"/>
+            <a:ext cx="5485320" cy="3085200"/>
           </a:xfrm>
           <a:prstGeom prst="rect">
             <a:avLst/>
@@ -1471,7 +1228,7 @@
         <p:spPr>
           <a:xfrm>
             <a:off x="685800" y="4400640"/>
-            <a:ext cx="5485680" cy="3599640"/>
+            <a:ext cx="5485320" cy="3599280"/>
           </a:xfrm>
           <a:prstGeom prst="rect">
             <a:avLst/>
@@ -1511,7 +1268,7 @@
         <p:spPr>
           <a:xfrm>
             <a:off x="3884760" y="8685360"/>
-            <a:ext cx="2971080" cy="457920"/>
+            <a:ext cx="2970720" cy="457560"/>
           </a:xfrm>
           <a:prstGeom prst="rect">
             <a:avLst/>
@@ -1553,7 +1310,7 @@
                 <a:tab algn="l" pos="0"/>
               </a:tabLst>
             </a:pPr>
-            <a:fld id="{61DED5C4-B10B-4069-891A-A0FB18E2CAF2}" type="slidenum">
+            <a:fld id="{1270F0E1-4351-43C0-A31A-5B814696A3B4}" type="slidenum">
               <a:rPr b="0" lang="en-US" sz="1200" spc="-1" strike="noStrike">
                 <a:solidFill>
                   <a:schemeClr val="dk1"/>
@@ -1607,7 +1364,7 @@
         <p:spPr>
           <a:xfrm>
             <a:off x="685800" y="1143000"/>
-            <a:ext cx="5485680" cy="3085560"/>
+            <a:ext cx="5485320" cy="3085200"/>
           </a:xfrm>
           <a:prstGeom prst="rect">
             <a:avLst/>
@@ -1630,7 +1387,7 @@
         <p:spPr>
           <a:xfrm>
             <a:off x="685800" y="4400640"/>
-            <a:ext cx="5485680" cy="3599640"/>
+            <a:ext cx="5485320" cy="3599280"/>
           </a:xfrm>
           <a:prstGeom prst="rect">
             <a:avLst/>
@@ -1670,7 +1427,7 @@
         <p:spPr>
           <a:xfrm>
             <a:off x="3884760" y="8685360"/>
-            <a:ext cx="2971080" cy="457920"/>
+            <a:ext cx="2970720" cy="457560"/>
           </a:xfrm>
           <a:prstGeom prst="rect">
             <a:avLst/>
@@ -1712,7 +1469,7 @@
                 <a:tab algn="l" pos="0"/>
               </a:tabLst>
             </a:pPr>
-            <a:fld id="{08BF1015-F0E2-4441-8795-8A41ACBA3C34}" type="slidenum">
+            <a:fld id="{97CF4C48-6ED8-4FC1-9EB1-6C5083DA7FC0}" type="slidenum">
               <a:rPr b="0" lang="en-US" sz="1200" spc="-1" strike="noStrike">
                 <a:solidFill>
                   <a:schemeClr val="dk1"/>
@@ -1766,7 +1523,7 @@
         <p:spPr>
           <a:xfrm>
             <a:off x="685800" y="1143000"/>
-            <a:ext cx="5485680" cy="3085560"/>
+            <a:ext cx="5485320" cy="3085200"/>
           </a:xfrm>
           <a:prstGeom prst="rect">
             <a:avLst/>
@@ -1789,7 +1546,7 @@
         <p:spPr>
           <a:xfrm>
             <a:off x="685800" y="4400640"/>
-            <a:ext cx="5485680" cy="3599640"/>
+            <a:ext cx="5485320" cy="3599280"/>
           </a:xfrm>
           <a:prstGeom prst="rect">
             <a:avLst/>
@@ -1829,7 +1586,7 @@
         <p:spPr>
           <a:xfrm>
             <a:off x="3884760" y="8685360"/>
-            <a:ext cx="2971080" cy="457920"/>
+            <a:ext cx="2970720" cy="457560"/>
           </a:xfrm>
           <a:prstGeom prst="rect">
             <a:avLst/>
@@ -1871,7 +1628,7 @@
                 <a:tab algn="l" pos="0"/>
               </a:tabLst>
             </a:pPr>
-            <a:fld id="{A0293199-5963-44B1-A11C-C516602B256C}" type="slidenum">
+            <a:fld id="{2BE118F0-4293-457C-A003-EA66CC697098}" type="slidenum">
               <a:rPr b="0" lang="en-US" sz="1200" spc="-1" strike="noStrike">
                 <a:solidFill>
                   <a:schemeClr val="dk1"/>
@@ -1925,7 +1682,7 @@
         <p:spPr>
           <a:xfrm>
             <a:off x="685800" y="1143000"/>
-            <a:ext cx="5485680" cy="3085560"/>
+            <a:ext cx="5485320" cy="3085200"/>
           </a:xfrm>
           <a:prstGeom prst="rect">
             <a:avLst/>
@@ -1948,7 +1705,7 @@
         <p:spPr>
           <a:xfrm>
             <a:off x="685800" y="4400640"/>
-            <a:ext cx="5485680" cy="3599640"/>
+            <a:ext cx="5485320" cy="3599280"/>
           </a:xfrm>
           <a:prstGeom prst="rect">
             <a:avLst/>
@@ -1988,7 +1745,7 @@
         <p:spPr>
           <a:xfrm>
             <a:off x="3884760" y="8685360"/>
-            <a:ext cx="2971080" cy="457920"/>
+            <a:ext cx="2970720" cy="457560"/>
           </a:xfrm>
           <a:prstGeom prst="rect">
             <a:avLst/>
@@ -2030,7 +1787,7 @@
                 <a:tab algn="l" pos="0"/>
               </a:tabLst>
             </a:pPr>
-            <a:fld id="{C07CAE14-424A-48C3-ADA4-89753F1CA00A}" type="slidenum">
+            <a:fld id="{1E22FD67-D9AE-4DAC-AF49-73FC3A2DDC79}" type="slidenum">
               <a:rPr b="0" lang="en-US" sz="1200" spc="-1" strike="noStrike">
                 <a:solidFill>
                   <a:schemeClr val="dk1"/>
@@ -2138,25 +1895,7 @@
                 </a:solidFill>
                 <a:latin typeface="Arial"/>
               </a:rPr>
-              <a:t>Click to edit </a:t>
-            </a:r>
-            <a:r>
-              <a:rPr b="0" lang="en-US" sz="4400" spc="-1" strike="noStrike">
-                <a:solidFill>
-                  <a:srgbClr val="000000"/>
-                </a:solidFill>
-                <a:latin typeface="Arial"/>
-              </a:rPr>
-              <a:t>the title text </a:t>
-            </a:r>
-            <a:r>
-              <a:rPr b="0" lang="en-US" sz="4400" spc="-1" strike="noStrike">
-                <a:solidFill>
-                  <a:srgbClr val="000000"/>
-                </a:solidFill>
-                <a:latin typeface="Arial"/>
-              </a:rPr>
-              <a:t>format</a:t>
+              <a:t>Click to edit the title text format</a:t>
             </a:r>
             <a:endParaRPr b="0" lang="en-US" sz="4400" spc="-1" strike="noStrike">
               <a:solidFill>
@@ -2434,7 +2173,7 @@
         <p:spPr>
           <a:xfrm>
             <a:off x="6217920" y="-1371600"/>
-            <a:ext cx="4754160" cy="4754160"/>
+            <a:ext cx="4753800" cy="4753800"/>
           </a:xfrm>
           <a:prstGeom prst="ellipse">
             <a:avLst/>
@@ -2483,7 +2222,7 @@
         <p:spPr>
           <a:xfrm>
             <a:off x="7498080" y="457200"/>
-            <a:ext cx="2285280" cy="2285280"/>
+            <a:ext cx="2284920" cy="2284920"/>
           </a:xfrm>
           <a:prstGeom prst="ellipse">
             <a:avLst/>
@@ -2536,7 +2275,7 @@
         <p:spPr>
           <a:xfrm>
             <a:off x="-1097280" y="3474720"/>
-            <a:ext cx="3474000" cy="3474000"/>
+            <a:ext cx="3473640" cy="3473640"/>
           </a:xfrm>
           <a:prstGeom prst="ellipse">
             <a:avLst/>
@@ -2589,7 +2328,7 @@
         <p:spPr>
           <a:xfrm>
             <a:off x="0" y="0"/>
-            <a:ext cx="182160" cy="5142960"/>
+            <a:ext cx="181800" cy="5142600"/>
           </a:xfrm>
           <a:prstGeom prst="rect">
             <a:avLst/>
@@ -2638,7 +2377,7 @@
         <p:spPr>
           <a:xfrm>
             <a:off x="438840" y="731520"/>
-            <a:ext cx="2651040" cy="365040"/>
+            <a:ext cx="2650680" cy="364680"/>
           </a:xfrm>
           <a:prstGeom prst="rect">
             <a:avLst/>
@@ -2687,7 +2426,7 @@
         <p:spPr>
           <a:xfrm>
             <a:off x="438840" y="731520"/>
-            <a:ext cx="2651040" cy="365040"/>
+            <a:ext cx="2650680" cy="364680"/>
           </a:xfrm>
           <a:prstGeom prst="rect">
             <a:avLst/>
@@ -2717,7 +2456,7 @@
               </a:tabLst>
             </a:pPr>
             <a:r>
-              <a:rPr b="1" lang="en-US" sz="950" spc="145" strike="noStrike">
+              <a:rPr b="1" lang="en-US" sz="950" spc="143" strike="noStrike">
                 <a:solidFill>
                   <a:srgbClr val="0b3d2e"/>
                 </a:solidFill>
@@ -2743,7 +2482,7 @@
         <p:spPr>
           <a:xfrm>
             <a:off x="438840" y="1298520"/>
-            <a:ext cx="8046000" cy="1005120"/>
+            <a:ext cx="8045640" cy="1004760"/>
           </a:xfrm>
           <a:prstGeom prst="rect">
             <a:avLst/>
@@ -2800,7 +2539,7 @@
         <p:spPr>
           <a:xfrm>
             <a:off x="438840" y="2359080"/>
-            <a:ext cx="7131600" cy="1005120"/>
+            <a:ext cx="7131240" cy="1004760"/>
           </a:xfrm>
           <a:prstGeom prst="rect">
             <a:avLst/>
@@ -2883,7 +2622,7 @@
         <p:spPr>
           <a:xfrm>
             <a:off x="438840" y="3547800"/>
-            <a:ext cx="1965240" cy="822240"/>
+            <a:ext cx="1964880" cy="821880"/>
           </a:xfrm>
           <a:prstGeom prst="rect">
             <a:avLst/>
@@ -2932,7 +2671,7 @@
         <p:spPr>
           <a:xfrm>
             <a:off x="438840" y="3547800"/>
-            <a:ext cx="1965240" cy="474840"/>
+            <a:ext cx="1964880" cy="474480"/>
           </a:xfrm>
           <a:prstGeom prst="rect">
             <a:avLst/>
@@ -2989,7 +2728,7 @@
         <p:spPr>
           <a:xfrm>
             <a:off x="438840" y="4023360"/>
-            <a:ext cx="1965240" cy="319320"/>
+            <a:ext cx="1964880" cy="318960"/>
           </a:xfrm>
           <a:prstGeom prst="rect">
             <a:avLst/>
@@ -3046,7 +2785,7 @@
         <p:spPr>
           <a:xfrm>
             <a:off x="2615040" y="3547800"/>
-            <a:ext cx="1965240" cy="822240"/>
+            <a:ext cx="1964880" cy="821880"/>
           </a:xfrm>
           <a:prstGeom prst="rect">
             <a:avLst/>
@@ -3095,7 +2834,7 @@
         <p:spPr>
           <a:xfrm>
             <a:off x="2615040" y="3547800"/>
-            <a:ext cx="1965240" cy="474840"/>
+            <a:ext cx="1964880" cy="474480"/>
           </a:xfrm>
           <a:prstGeom prst="rect">
             <a:avLst/>
@@ -3152,7 +2891,7 @@
         <p:spPr>
           <a:xfrm>
             <a:off x="2615040" y="4023360"/>
-            <a:ext cx="1965240" cy="319320"/>
+            <a:ext cx="1964880" cy="318960"/>
           </a:xfrm>
           <a:prstGeom prst="rect">
             <a:avLst/>
@@ -3209,7 +2948,7 @@
         <p:spPr>
           <a:xfrm>
             <a:off x="4791600" y="3547800"/>
-            <a:ext cx="1965240" cy="822240"/>
+            <a:ext cx="1964880" cy="821880"/>
           </a:xfrm>
           <a:prstGeom prst="rect">
             <a:avLst/>
@@ -3258,7 +2997,7 @@
         <p:spPr>
           <a:xfrm>
             <a:off x="4791600" y="3547800"/>
-            <a:ext cx="1965240" cy="474840"/>
+            <a:ext cx="1964880" cy="474480"/>
           </a:xfrm>
           <a:prstGeom prst="rect">
             <a:avLst/>
@@ -3315,7 +3054,7 @@
         <p:spPr>
           <a:xfrm>
             <a:off x="4791600" y="4023360"/>
-            <a:ext cx="1965240" cy="319320"/>
+            <a:ext cx="1964880" cy="318960"/>
           </a:xfrm>
           <a:prstGeom prst="rect">
             <a:avLst/>
@@ -3372,7 +3111,7 @@
         <p:spPr>
           <a:xfrm>
             <a:off x="6967800" y="3547800"/>
-            <a:ext cx="1965240" cy="822240"/>
+            <a:ext cx="1964880" cy="821880"/>
           </a:xfrm>
           <a:prstGeom prst="rect">
             <a:avLst/>
@@ -3421,7 +3160,7 @@
         <p:spPr>
           <a:xfrm>
             <a:off x="6967800" y="3547800"/>
-            <a:ext cx="1965240" cy="474840"/>
+            <a:ext cx="1964880" cy="474480"/>
           </a:xfrm>
           <a:prstGeom prst="rect">
             <a:avLst/>
@@ -3478,7 +3217,7 @@
         <p:spPr>
           <a:xfrm>
             <a:off x="6967800" y="4023360"/>
-            <a:ext cx="1965240" cy="319320"/>
+            <a:ext cx="1964880" cy="318960"/>
           </a:xfrm>
           <a:prstGeom prst="rect">
             <a:avLst/>
@@ -3535,7 +3274,7 @@
         <p:spPr>
           <a:xfrm>
             <a:off x="438840" y="4709160"/>
-            <a:ext cx="8228880" cy="255240"/>
+            <a:ext cx="8228520" cy="254880"/>
           </a:xfrm>
           <a:prstGeom prst="rect">
             <a:avLst/>
@@ -3619,7 +3358,7 @@
         <p:spPr>
           <a:xfrm>
             <a:off x="0" y="0"/>
-            <a:ext cx="9143280" cy="959400"/>
+            <a:ext cx="9142920" cy="959040"/>
           </a:xfrm>
           <a:prstGeom prst="rect">
             <a:avLst/>
@@ -3668,7 +3407,7 @@
         <p:spPr>
           <a:xfrm>
             <a:off x="0" y="960120"/>
-            <a:ext cx="9143280" cy="63360"/>
+            <a:ext cx="9142920" cy="63000"/>
           </a:xfrm>
           <a:prstGeom prst="rect">
             <a:avLst/>
@@ -3717,7 +3456,7 @@
         <p:spPr>
           <a:xfrm>
             <a:off x="411480" y="0"/>
-            <a:ext cx="8320320" cy="959400"/>
+            <a:ext cx="8319960" cy="959040"/>
           </a:xfrm>
           <a:prstGeom prst="rect">
             <a:avLst/>
@@ -3774,7 +3513,7 @@
         <p:spPr>
           <a:xfrm>
             <a:off x="365760" y="1188720"/>
-            <a:ext cx="8411760" cy="1078200"/>
+            <a:ext cx="8411400" cy="1077840"/>
           </a:xfrm>
           <a:prstGeom prst="rect">
             <a:avLst/>
@@ -3830,7 +3569,7 @@
         <p:spPr>
           <a:xfrm>
             <a:off x="548640" y="1207080"/>
-            <a:ext cx="8046000" cy="1005120"/>
+            <a:ext cx="8045640" cy="1004760"/>
           </a:xfrm>
           <a:prstGeom prst="rect">
             <a:avLst/>
@@ -3917,7 +3656,7 @@
         <p:spPr>
           <a:xfrm>
             <a:off x="365760" y="2359080"/>
-            <a:ext cx="8411760" cy="328320"/>
+            <a:ext cx="8411400" cy="327960"/>
           </a:xfrm>
           <a:prstGeom prst="rect">
             <a:avLst/>
@@ -3974,7 +3713,7 @@
         <p:spPr>
           <a:xfrm>
             <a:off x="347400" y="2816280"/>
-            <a:ext cx="2651040" cy="2084040"/>
+            <a:ext cx="2650680" cy="2083680"/>
           </a:xfrm>
           <a:prstGeom prst="rect">
             <a:avLst/>
@@ -4030,7 +3769,7 @@
         <p:spPr>
           <a:xfrm>
             <a:off x="347400" y="2834640"/>
-            <a:ext cx="2651040" cy="529560"/>
+            <a:ext cx="2650680" cy="529200"/>
           </a:xfrm>
           <a:prstGeom prst="rect">
             <a:avLst/>
@@ -4086,7 +3825,7 @@
         <p:spPr>
           <a:xfrm>
             <a:off x="438840" y="3337560"/>
-            <a:ext cx="2468160" cy="456480"/>
+            <a:ext cx="2467800" cy="456120"/>
           </a:xfrm>
           <a:prstGeom prst="rect">
             <a:avLst/>
@@ -4169,7 +3908,7 @@
         <p:spPr>
           <a:xfrm>
             <a:off x="457200" y="3822120"/>
-            <a:ext cx="2431440" cy="1005120"/>
+            <a:ext cx="2431080" cy="1004760"/>
           </a:xfrm>
           <a:prstGeom prst="rect">
             <a:avLst/>
@@ -4226,7 +3965,7 @@
         <p:spPr>
           <a:xfrm>
             <a:off x="3182040" y="2816280"/>
-            <a:ext cx="2651040" cy="2084040"/>
+            <a:ext cx="2650680" cy="2083680"/>
           </a:xfrm>
           <a:prstGeom prst="rect">
             <a:avLst/>
@@ -4282,7 +4021,7 @@
         <p:spPr>
           <a:xfrm>
             <a:off x="3182040" y="2834640"/>
-            <a:ext cx="2651040" cy="529560"/>
+            <a:ext cx="2650680" cy="529200"/>
           </a:xfrm>
           <a:prstGeom prst="rect">
             <a:avLst/>
@@ -4338,7 +4077,7 @@
         <p:spPr>
           <a:xfrm>
             <a:off x="3273480" y="3337560"/>
-            <a:ext cx="2468160" cy="456480"/>
+            <a:ext cx="2467800" cy="456120"/>
           </a:xfrm>
           <a:prstGeom prst="rect">
             <a:avLst/>
@@ -4421,7 +4160,7 @@
         <p:spPr>
           <a:xfrm>
             <a:off x="3291840" y="3822120"/>
-            <a:ext cx="2431440" cy="1005120"/>
+            <a:ext cx="2431080" cy="1004760"/>
           </a:xfrm>
           <a:prstGeom prst="rect">
             <a:avLst/>
@@ -4478,7 +4217,7 @@
         <p:spPr>
           <a:xfrm>
             <a:off x="6016680" y="2816280"/>
-            <a:ext cx="2651040" cy="2084040"/>
+            <a:ext cx="2650680" cy="2083680"/>
           </a:xfrm>
           <a:prstGeom prst="rect">
             <a:avLst/>
@@ -4534,7 +4273,7 @@
         <p:spPr>
           <a:xfrm>
             <a:off x="6016680" y="2834640"/>
-            <a:ext cx="2651040" cy="529560"/>
+            <a:ext cx="2650680" cy="529200"/>
           </a:xfrm>
           <a:prstGeom prst="rect">
             <a:avLst/>
@@ -4590,7 +4329,7 @@
         <p:spPr>
           <a:xfrm>
             <a:off x="6108120" y="3337560"/>
-            <a:ext cx="2468160" cy="456480"/>
+            <a:ext cx="2467800" cy="456120"/>
           </a:xfrm>
           <a:prstGeom prst="rect">
             <a:avLst/>
@@ -4673,7 +4412,7 @@
         <p:spPr>
           <a:xfrm>
             <a:off x="6126480" y="3822120"/>
-            <a:ext cx="2431440" cy="1005120"/>
+            <a:ext cx="2431080" cy="1004760"/>
           </a:xfrm>
           <a:prstGeom prst="rect">
             <a:avLst/>
@@ -4767,7 +4506,7 @@
         <p:spPr>
           <a:xfrm>
             <a:off x="0" y="0"/>
-            <a:ext cx="9143280" cy="913680"/>
+            <a:ext cx="9142920" cy="913320"/>
           </a:xfrm>
           <a:prstGeom prst="rect">
             <a:avLst/>
@@ -4816,7 +4555,7 @@
         <p:spPr>
           <a:xfrm>
             <a:off x="0" y="914400"/>
-            <a:ext cx="9143280" cy="54000"/>
+            <a:ext cx="9142920" cy="53640"/>
           </a:xfrm>
           <a:prstGeom prst="rect">
             <a:avLst/>
@@ -4865,7 +4604,7 @@
         <p:spPr>
           <a:xfrm>
             <a:off x="411480" y="0"/>
-            <a:ext cx="8320320" cy="913680"/>
+            <a:ext cx="8319960" cy="913320"/>
           </a:xfrm>
           <a:prstGeom prst="rect">
             <a:avLst/>
@@ -4964,7 +4703,7 @@
         <p:spPr>
           <a:xfrm>
             <a:off x="384120" y="1078920"/>
-            <a:ext cx="511200" cy="511200"/>
+            <a:ext cx="510840" cy="510840"/>
           </a:xfrm>
           <a:prstGeom prst="ellipse">
             <a:avLst/>
@@ -5013,7 +4752,7 @@
         <p:spPr>
           <a:xfrm>
             <a:off x="384120" y="1078920"/>
-            <a:ext cx="511200" cy="511200"/>
+            <a:ext cx="510840" cy="510840"/>
           </a:xfrm>
           <a:prstGeom prst="rect">
             <a:avLst/>
@@ -5069,7 +4808,7 @@
         <p:spPr>
           <a:xfrm>
             <a:off x="1051560" y="1078920"/>
-            <a:ext cx="7725960" cy="685080"/>
+            <a:ext cx="7725600" cy="684720"/>
           </a:xfrm>
           <a:prstGeom prst="rect">
             <a:avLst/>
@@ -5118,7 +4857,7 @@
         <p:spPr>
           <a:xfrm>
             <a:off x="1188720" y="1115640"/>
-            <a:ext cx="2376720" cy="319320"/>
+            <a:ext cx="2376360" cy="318960"/>
           </a:xfrm>
           <a:prstGeom prst="rect">
             <a:avLst/>
@@ -5175,7 +4914,7 @@
         <p:spPr>
           <a:xfrm>
             <a:off x="1188720" y="1408320"/>
-            <a:ext cx="7405920" cy="300960"/>
+            <a:ext cx="7405560" cy="300600"/>
           </a:xfrm>
           <a:prstGeom prst="rect">
             <a:avLst/>
@@ -5274,7 +5013,7 @@
         <p:spPr>
           <a:xfrm>
             <a:off x="384120" y="1874520"/>
-            <a:ext cx="511200" cy="511200"/>
+            <a:ext cx="510840" cy="510840"/>
           </a:xfrm>
           <a:prstGeom prst="ellipse">
             <a:avLst/>
@@ -5323,7 +5062,7 @@
         <p:spPr>
           <a:xfrm>
             <a:off x="384120" y="1874520"/>
-            <a:ext cx="511200" cy="511200"/>
+            <a:ext cx="510840" cy="510840"/>
           </a:xfrm>
           <a:prstGeom prst="rect">
             <a:avLst/>
@@ -5379,7 +5118,7 @@
         <p:spPr>
           <a:xfrm>
             <a:off x="1051560" y="1874520"/>
-            <a:ext cx="7725960" cy="685080"/>
+            <a:ext cx="7725600" cy="684720"/>
           </a:xfrm>
           <a:prstGeom prst="rect">
             <a:avLst/>
@@ -5428,7 +5167,7 @@
         <p:spPr>
           <a:xfrm>
             <a:off x="1188720" y="1911240"/>
-            <a:ext cx="2376720" cy="319320"/>
+            <a:ext cx="2376360" cy="318960"/>
           </a:xfrm>
           <a:prstGeom prst="rect">
             <a:avLst/>
@@ -5485,7 +5224,7 @@
         <p:spPr>
           <a:xfrm>
             <a:off x="1188720" y="2203560"/>
-            <a:ext cx="7405920" cy="300960"/>
+            <a:ext cx="7405560" cy="300600"/>
           </a:xfrm>
           <a:prstGeom prst="rect">
             <a:avLst/>
@@ -5584,7 +5323,7 @@
         <p:spPr>
           <a:xfrm>
             <a:off x="384120" y="2670120"/>
-            <a:ext cx="511200" cy="511200"/>
+            <a:ext cx="510840" cy="510840"/>
           </a:xfrm>
           <a:prstGeom prst="ellipse">
             <a:avLst/>
@@ -5633,7 +5372,7 @@
         <p:spPr>
           <a:xfrm>
             <a:off x="384120" y="2670120"/>
-            <a:ext cx="511200" cy="511200"/>
+            <a:ext cx="510840" cy="510840"/>
           </a:xfrm>
           <a:prstGeom prst="rect">
             <a:avLst/>
@@ -5689,7 +5428,7 @@
         <p:spPr>
           <a:xfrm>
             <a:off x="1051560" y="2670120"/>
-            <a:ext cx="7725960" cy="685080"/>
+            <a:ext cx="7725600" cy="684720"/>
           </a:xfrm>
           <a:prstGeom prst="rect">
             <a:avLst/>
@@ -5738,7 +5477,7 @@
         <p:spPr>
           <a:xfrm>
             <a:off x="1188720" y="2706480"/>
-            <a:ext cx="2376720" cy="319320"/>
+            <a:ext cx="2376360" cy="318960"/>
           </a:xfrm>
           <a:prstGeom prst="rect">
             <a:avLst/>
@@ -5795,7 +5534,7 @@
         <p:spPr>
           <a:xfrm>
             <a:off x="1188720" y="2999160"/>
-            <a:ext cx="7405920" cy="300960"/>
+            <a:ext cx="7405560" cy="300600"/>
           </a:xfrm>
           <a:prstGeom prst="rect">
             <a:avLst/>
@@ -5894,7 +5633,7 @@
         <p:spPr>
           <a:xfrm>
             <a:off x="384120" y="3465720"/>
-            <a:ext cx="511200" cy="511200"/>
+            <a:ext cx="510840" cy="510840"/>
           </a:xfrm>
           <a:prstGeom prst="ellipse">
             <a:avLst/>
@@ -5943,7 +5682,7 @@
         <p:spPr>
           <a:xfrm>
             <a:off x="384120" y="3465720"/>
-            <a:ext cx="511200" cy="511200"/>
+            <a:ext cx="510840" cy="510840"/>
           </a:xfrm>
           <a:prstGeom prst="rect">
             <a:avLst/>
@@ -5999,7 +5738,7 @@
         <p:spPr>
           <a:xfrm>
             <a:off x="1051560" y="3465720"/>
-            <a:ext cx="7725960" cy="685080"/>
+            <a:ext cx="7725600" cy="684720"/>
           </a:xfrm>
           <a:prstGeom prst="rect">
             <a:avLst/>
@@ -6048,7 +5787,7 @@
         <p:spPr>
           <a:xfrm>
             <a:off x="1188720" y="3502080"/>
-            <a:ext cx="2376720" cy="319320"/>
+            <a:ext cx="2376360" cy="318960"/>
           </a:xfrm>
           <a:prstGeom prst="rect">
             <a:avLst/>
@@ -6105,7 +5844,7 @@
         <p:spPr>
           <a:xfrm>
             <a:off x="1188720" y="3794760"/>
-            <a:ext cx="7405920" cy="300960"/>
+            <a:ext cx="7405560" cy="300600"/>
           </a:xfrm>
           <a:prstGeom prst="rect">
             <a:avLst/>
@@ -6162,7 +5901,7 @@
         <p:spPr>
           <a:xfrm>
             <a:off x="384120" y="4260960"/>
-            <a:ext cx="511200" cy="511200"/>
+            <a:ext cx="510840" cy="510840"/>
           </a:xfrm>
           <a:prstGeom prst="ellipse">
             <a:avLst/>
@@ -6211,7 +5950,7 @@
         <p:spPr>
           <a:xfrm>
             <a:off x="384120" y="4260960"/>
-            <a:ext cx="511200" cy="511200"/>
+            <a:ext cx="510840" cy="510840"/>
           </a:xfrm>
           <a:prstGeom prst="rect">
             <a:avLst/>
@@ -6267,7 +6006,7 @@
         <p:spPr>
           <a:xfrm>
             <a:off x="1051560" y="4260960"/>
-            <a:ext cx="7725960" cy="685080"/>
+            <a:ext cx="7725600" cy="684720"/>
           </a:xfrm>
           <a:prstGeom prst="rect">
             <a:avLst/>
@@ -6316,7 +6055,7 @@
         <p:spPr>
           <a:xfrm>
             <a:off x="1188720" y="4297680"/>
-            <a:ext cx="2376720" cy="319320"/>
+            <a:ext cx="2376360" cy="318960"/>
           </a:xfrm>
           <a:prstGeom prst="rect">
             <a:avLst/>
@@ -6373,7 +6112,7 @@
         <p:spPr>
           <a:xfrm>
             <a:off x="1188720" y="4590360"/>
-            <a:ext cx="7405920" cy="300960"/>
+            <a:ext cx="7405560" cy="300600"/>
           </a:xfrm>
           <a:prstGeom prst="rect">
             <a:avLst/>
@@ -6467,7 +6206,7 @@
         <p:spPr>
           <a:xfrm>
             <a:off x="0" y="0"/>
-            <a:ext cx="9143280" cy="959400"/>
+            <a:ext cx="9142920" cy="959040"/>
           </a:xfrm>
           <a:prstGeom prst="rect">
             <a:avLst/>
@@ -6516,7 +6255,7 @@
         <p:spPr>
           <a:xfrm>
             <a:off x="0" y="960120"/>
-            <a:ext cx="9143280" cy="63360"/>
+            <a:ext cx="9142920" cy="63000"/>
           </a:xfrm>
           <a:prstGeom prst="rect">
             <a:avLst/>
@@ -6565,7 +6304,7 @@
         <p:spPr>
           <a:xfrm>
             <a:off x="411480" y="0"/>
-            <a:ext cx="8320320" cy="959400"/>
+            <a:ext cx="8319960" cy="959040"/>
           </a:xfrm>
           <a:prstGeom prst="rect">
             <a:avLst/>
@@ -6622,7 +6361,7 @@
         <p:spPr>
           <a:xfrm>
             <a:off x="292680" y="1143000"/>
-            <a:ext cx="2010960" cy="1663560"/>
+            <a:ext cx="2010600" cy="1663200"/>
           </a:xfrm>
           <a:prstGeom prst="rect">
             <a:avLst/>
@@ -6678,7 +6417,7 @@
         <p:spPr>
           <a:xfrm>
             <a:off x="292680" y="1234440"/>
-            <a:ext cx="2010960" cy="456480"/>
+            <a:ext cx="2010600" cy="456120"/>
           </a:xfrm>
           <a:prstGeom prst="rect">
             <a:avLst/>
@@ -6734,7 +6473,7 @@
         <p:spPr>
           <a:xfrm>
             <a:off x="384120" y="1691640"/>
-            <a:ext cx="1828080" cy="383400"/>
+            <a:ext cx="1827720" cy="383040"/>
           </a:xfrm>
           <a:prstGeom prst="rect">
             <a:avLst/>
@@ -6791,7 +6530,7 @@
         <p:spPr>
           <a:xfrm>
             <a:off x="384120" y="2057400"/>
-            <a:ext cx="1828080" cy="685080"/>
+            <a:ext cx="1827720" cy="684720"/>
           </a:xfrm>
           <a:prstGeom prst="rect">
             <a:avLst/>
@@ -6848,7 +6587,7 @@
         <p:spPr>
           <a:xfrm>
             <a:off x="2459880" y="1143000"/>
-            <a:ext cx="2010960" cy="1663560"/>
+            <a:ext cx="2010600" cy="1663200"/>
           </a:xfrm>
           <a:prstGeom prst="rect">
             <a:avLst/>
@@ -6904,7 +6643,7 @@
         <p:spPr>
           <a:xfrm>
             <a:off x="2459880" y="1234440"/>
-            <a:ext cx="2010960" cy="456480"/>
+            <a:ext cx="2010600" cy="456120"/>
           </a:xfrm>
           <a:prstGeom prst="rect">
             <a:avLst/>
@@ -6960,7 +6699,7 @@
         <p:spPr>
           <a:xfrm>
             <a:off x="2551320" y="1691640"/>
-            <a:ext cx="1828080" cy="383400"/>
+            <a:ext cx="1827720" cy="383040"/>
           </a:xfrm>
           <a:prstGeom prst="rect">
             <a:avLst/>
@@ -7017,7 +6756,7 @@
         <p:spPr>
           <a:xfrm>
             <a:off x="2551320" y="2057400"/>
-            <a:ext cx="1828080" cy="685080"/>
+            <a:ext cx="1827720" cy="684720"/>
           </a:xfrm>
           <a:prstGeom prst="rect">
             <a:avLst/>
@@ -7074,7 +6813,7 @@
         <p:spPr>
           <a:xfrm>
             <a:off x="4626720" y="1143000"/>
-            <a:ext cx="2010960" cy="1663560"/>
+            <a:ext cx="2010600" cy="1663200"/>
           </a:xfrm>
           <a:prstGeom prst="rect">
             <a:avLst/>
@@ -7130,7 +6869,7 @@
         <p:spPr>
           <a:xfrm>
             <a:off x="4626720" y="1234440"/>
-            <a:ext cx="2010960" cy="456480"/>
+            <a:ext cx="2010600" cy="456120"/>
           </a:xfrm>
           <a:prstGeom prst="rect">
             <a:avLst/>
@@ -7186,7 +6925,7 @@
         <p:spPr>
           <a:xfrm>
             <a:off x="4718160" y="1691640"/>
-            <a:ext cx="1828080" cy="383400"/>
+            <a:ext cx="1827720" cy="383040"/>
           </a:xfrm>
           <a:prstGeom prst="rect">
             <a:avLst/>
@@ -7243,7 +6982,7 @@
         <p:spPr>
           <a:xfrm>
             <a:off x="4718160" y="2057400"/>
-            <a:ext cx="1828080" cy="685080"/>
+            <a:ext cx="1827720" cy="684720"/>
           </a:xfrm>
           <a:prstGeom prst="rect">
             <a:avLst/>
@@ -7300,7 +7039,7 @@
         <p:spPr>
           <a:xfrm>
             <a:off x="6793920" y="1143000"/>
-            <a:ext cx="2010960" cy="1663560"/>
+            <a:ext cx="2010600" cy="1663200"/>
           </a:xfrm>
           <a:prstGeom prst="rect">
             <a:avLst/>
@@ -7356,7 +7095,7 @@
         <p:spPr>
           <a:xfrm>
             <a:off x="6793920" y="1234440"/>
-            <a:ext cx="2010960" cy="456480"/>
+            <a:ext cx="2010600" cy="456120"/>
           </a:xfrm>
           <a:prstGeom prst="rect">
             <a:avLst/>
@@ -7412,7 +7151,7 @@
         <p:spPr>
           <a:xfrm>
             <a:off x="6885360" y="1691640"/>
-            <a:ext cx="1828080" cy="383400"/>
+            <a:ext cx="1827720" cy="383040"/>
           </a:xfrm>
           <a:prstGeom prst="rect">
             <a:avLst/>
@@ -7469,7 +7208,7 @@
         <p:spPr>
           <a:xfrm>
             <a:off x="6885360" y="2057400"/>
-            <a:ext cx="1828080" cy="685080"/>
+            <a:ext cx="1827720" cy="684720"/>
           </a:xfrm>
           <a:prstGeom prst="rect">
             <a:avLst/>
@@ -7526,7 +7265,7 @@
         <p:spPr>
           <a:xfrm>
             <a:off x="292680" y="2953440"/>
-            <a:ext cx="2010960" cy="1663560"/>
+            <a:ext cx="2010600" cy="1663200"/>
           </a:xfrm>
           <a:prstGeom prst="rect">
             <a:avLst/>
@@ -7582,7 +7321,7 @@
         <p:spPr>
           <a:xfrm>
             <a:off x="292680" y="3044880"/>
-            <a:ext cx="2010960" cy="456480"/>
+            <a:ext cx="2010600" cy="456120"/>
           </a:xfrm>
           <a:prstGeom prst="rect">
             <a:avLst/>
@@ -7638,7 +7377,7 @@
         <p:spPr>
           <a:xfrm>
             <a:off x="384120" y="3502080"/>
-            <a:ext cx="1828080" cy="383400"/>
+            <a:ext cx="1827720" cy="383040"/>
           </a:xfrm>
           <a:prstGeom prst="rect">
             <a:avLst/>
@@ -7695,7 +7434,7 @@
         <p:spPr>
           <a:xfrm>
             <a:off x="384120" y="3867840"/>
-            <a:ext cx="1828080" cy="685080"/>
+            <a:ext cx="1827720" cy="684720"/>
           </a:xfrm>
           <a:prstGeom prst="rect">
             <a:avLst/>
@@ -7752,7 +7491,7 @@
         <p:spPr>
           <a:xfrm>
             <a:off x="2459880" y="2953440"/>
-            <a:ext cx="2010960" cy="1663560"/>
+            <a:ext cx="2010600" cy="1663200"/>
           </a:xfrm>
           <a:prstGeom prst="rect">
             <a:avLst/>
@@ -7808,7 +7547,7 @@
         <p:spPr>
           <a:xfrm>
             <a:off x="2459880" y="3044880"/>
-            <a:ext cx="2010960" cy="456480"/>
+            <a:ext cx="2010600" cy="456120"/>
           </a:xfrm>
           <a:prstGeom prst="rect">
             <a:avLst/>
@@ -7864,7 +7603,7 @@
         <p:spPr>
           <a:xfrm>
             <a:off x="2551320" y="3502080"/>
-            <a:ext cx="1828080" cy="383400"/>
+            <a:ext cx="1827720" cy="383040"/>
           </a:xfrm>
           <a:prstGeom prst="rect">
             <a:avLst/>
@@ -7921,7 +7660,7 @@
         <p:spPr>
           <a:xfrm>
             <a:off x="2551320" y="3867840"/>
-            <a:ext cx="1828080" cy="685080"/>
+            <a:ext cx="1827720" cy="684720"/>
           </a:xfrm>
           <a:prstGeom prst="rect">
             <a:avLst/>
@@ -7978,7 +7717,7 @@
         <p:spPr>
           <a:xfrm>
             <a:off x="4626720" y="2953440"/>
-            <a:ext cx="2010960" cy="1663560"/>
+            <a:ext cx="2010600" cy="1663200"/>
           </a:xfrm>
           <a:prstGeom prst="rect">
             <a:avLst/>
@@ -8034,7 +7773,7 @@
         <p:spPr>
           <a:xfrm>
             <a:off x="4626720" y="3044880"/>
-            <a:ext cx="2010960" cy="456480"/>
+            <a:ext cx="2010600" cy="456120"/>
           </a:xfrm>
           <a:prstGeom prst="rect">
             <a:avLst/>
@@ -8090,7 +7829,7 @@
         <p:spPr>
           <a:xfrm>
             <a:off x="4718160" y="3502080"/>
-            <a:ext cx="1828080" cy="383400"/>
+            <a:ext cx="1827720" cy="383040"/>
           </a:xfrm>
           <a:prstGeom prst="rect">
             <a:avLst/>
@@ -8147,7 +7886,7 @@
         <p:spPr>
           <a:xfrm>
             <a:off x="4718160" y="3867840"/>
-            <a:ext cx="1828080" cy="685080"/>
+            <a:ext cx="1827720" cy="684720"/>
           </a:xfrm>
           <a:prstGeom prst="rect">
             <a:avLst/>
@@ -8241,7 +7980,7 @@
         <p:spPr>
           <a:xfrm>
             <a:off x="0" y="0"/>
-            <a:ext cx="9143280" cy="913680"/>
+            <a:ext cx="9142920" cy="913320"/>
           </a:xfrm>
           <a:prstGeom prst="rect">
             <a:avLst/>
@@ -8290,7 +8029,7 @@
         <p:spPr>
           <a:xfrm>
             <a:off x="411480" y="0"/>
-            <a:ext cx="8320320" cy="913680"/>
+            <a:ext cx="8319960" cy="913320"/>
           </a:xfrm>
           <a:prstGeom prst="rect">
             <a:avLst/>
@@ -8347,7 +8086,7 @@
         <p:spPr>
           <a:xfrm>
             <a:off x="320040" y="1051560"/>
-            <a:ext cx="4205520" cy="1169640"/>
+            <a:ext cx="4205160" cy="1169280"/>
           </a:xfrm>
           <a:prstGeom prst="rect">
             <a:avLst/>
@@ -8403,7 +8142,7 @@
         <p:spPr>
           <a:xfrm>
             <a:off x="320040" y="1051560"/>
-            <a:ext cx="109080" cy="1169640"/>
+            <a:ext cx="108720" cy="1169280"/>
           </a:xfrm>
           <a:prstGeom prst="rect">
             <a:avLst/>
@@ -8452,7 +8191,7 @@
         <p:spPr>
           <a:xfrm>
             <a:off x="521280" y="1143000"/>
-            <a:ext cx="547920" cy="547920"/>
+            <a:ext cx="547560" cy="547560"/>
           </a:xfrm>
           <a:prstGeom prst="rect">
             <a:avLst/>
@@ -8508,7 +8247,7 @@
         <p:spPr>
           <a:xfrm>
             <a:off x="1124640" y="1115640"/>
-            <a:ext cx="3245400" cy="346680"/>
+            <a:ext cx="3245040" cy="346320"/>
           </a:xfrm>
           <a:prstGeom prst="rect">
             <a:avLst/>
@@ -8565,7 +8304,7 @@
         <p:spPr>
           <a:xfrm>
             <a:off x="1124640" y="1454040"/>
-            <a:ext cx="3245400" cy="712440"/>
+            <a:ext cx="3245040" cy="712080"/>
           </a:xfrm>
           <a:prstGeom prst="rect">
             <a:avLst/>
@@ -8622,7 +8361,7 @@
         <p:spPr>
           <a:xfrm>
             <a:off x="4800600" y="1051560"/>
-            <a:ext cx="4205520" cy="1169640"/>
+            <a:ext cx="4205160" cy="1169280"/>
           </a:xfrm>
           <a:prstGeom prst="rect">
             <a:avLst/>
@@ -8678,7 +8417,7 @@
         <p:spPr>
           <a:xfrm>
             <a:off x="4800600" y="1051560"/>
-            <a:ext cx="109080" cy="1169640"/>
+            <a:ext cx="108720" cy="1169280"/>
           </a:xfrm>
           <a:prstGeom prst="rect">
             <a:avLst/>
@@ -8727,7 +8466,7 @@
         <p:spPr>
           <a:xfrm>
             <a:off x="5001840" y="1143000"/>
-            <a:ext cx="547920" cy="547920"/>
+            <a:ext cx="547560" cy="547560"/>
           </a:xfrm>
           <a:prstGeom prst="rect">
             <a:avLst/>
@@ -8783,7 +8522,7 @@
         <p:spPr>
           <a:xfrm>
             <a:off x="5605200" y="1115640"/>
-            <a:ext cx="3245400" cy="346680"/>
+            <a:ext cx="3245040" cy="346320"/>
           </a:xfrm>
           <a:prstGeom prst="rect">
             <a:avLst/>
@@ -8840,7 +8579,7 @@
         <p:spPr>
           <a:xfrm>
             <a:off x="5605200" y="1454040"/>
-            <a:ext cx="3245400" cy="712440"/>
+            <a:ext cx="3245040" cy="712080"/>
           </a:xfrm>
           <a:prstGeom prst="rect">
             <a:avLst/>
@@ -8897,7 +8636,7 @@
         <p:spPr>
           <a:xfrm>
             <a:off x="320040" y="2368440"/>
-            <a:ext cx="4205520" cy="1169640"/>
+            <a:ext cx="4205160" cy="1169280"/>
           </a:xfrm>
           <a:prstGeom prst="rect">
             <a:avLst/>
@@ -8953,7 +8692,7 @@
         <p:spPr>
           <a:xfrm>
             <a:off x="320040" y="2368440"/>
-            <a:ext cx="109080" cy="1169640"/>
+            <a:ext cx="108720" cy="1169280"/>
           </a:xfrm>
           <a:prstGeom prst="rect">
             <a:avLst/>
@@ -9002,7 +8741,7 @@
         <p:spPr>
           <a:xfrm>
             <a:off x="521280" y="2459880"/>
-            <a:ext cx="547920" cy="547920"/>
+            <a:ext cx="547560" cy="547560"/>
           </a:xfrm>
           <a:prstGeom prst="rect">
             <a:avLst/>
@@ -9058,7 +8797,7 @@
         <p:spPr>
           <a:xfrm>
             <a:off x="1124640" y="2432160"/>
-            <a:ext cx="3245400" cy="346680"/>
+            <a:ext cx="3245040" cy="346320"/>
           </a:xfrm>
           <a:prstGeom prst="rect">
             <a:avLst/>
@@ -9115,7 +8854,7 @@
         <p:spPr>
           <a:xfrm>
             <a:off x="1124640" y="2770560"/>
-            <a:ext cx="3245400" cy="712440"/>
+            <a:ext cx="3245040" cy="712080"/>
           </a:xfrm>
           <a:prstGeom prst="rect">
             <a:avLst/>
@@ -9172,7 +8911,7 @@
         <p:spPr>
           <a:xfrm>
             <a:off x="4800600" y="2368440"/>
-            <a:ext cx="4205520" cy="1169640"/>
+            <a:ext cx="4205160" cy="1169280"/>
           </a:xfrm>
           <a:prstGeom prst="rect">
             <a:avLst/>
@@ -9228,7 +8967,7 @@
         <p:spPr>
           <a:xfrm>
             <a:off x="4800600" y="2368440"/>
-            <a:ext cx="109080" cy="1169640"/>
+            <a:ext cx="108720" cy="1169280"/>
           </a:xfrm>
           <a:prstGeom prst="rect">
             <a:avLst/>
@@ -9277,7 +9016,7 @@
         <p:spPr>
           <a:xfrm>
             <a:off x="5001840" y="2459880"/>
-            <a:ext cx="547920" cy="547920"/>
+            <a:ext cx="547560" cy="547560"/>
           </a:xfrm>
           <a:prstGeom prst="rect">
             <a:avLst/>
@@ -9333,7 +9072,7 @@
         <p:spPr>
           <a:xfrm>
             <a:off x="5605200" y="2432160"/>
-            <a:ext cx="3245400" cy="346680"/>
+            <a:ext cx="3245040" cy="346320"/>
           </a:xfrm>
           <a:prstGeom prst="rect">
             <a:avLst/>
@@ -9390,7 +9129,7 @@
         <p:spPr>
           <a:xfrm>
             <a:off x="5605200" y="2770560"/>
-            <a:ext cx="3245400" cy="712440"/>
+            <a:ext cx="3245040" cy="712080"/>
           </a:xfrm>
           <a:prstGeom prst="rect">
             <a:avLst/>
@@ -9447,7 +9186,7 @@
         <p:spPr>
           <a:xfrm>
             <a:off x="320040" y="3684960"/>
-            <a:ext cx="4205520" cy="1169640"/>
+            <a:ext cx="4205160" cy="1169280"/>
           </a:xfrm>
           <a:prstGeom prst="rect">
             <a:avLst/>
@@ -9503,7 +9242,7 @@
         <p:spPr>
           <a:xfrm>
             <a:off x="320040" y="3684960"/>
-            <a:ext cx="109080" cy="1169640"/>
+            <a:ext cx="108720" cy="1169280"/>
           </a:xfrm>
           <a:prstGeom prst="rect">
             <a:avLst/>
@@ -9552,7 +9291,7 @@
         <p:spPr>
           <a:xfrm>
             <a:off x="521280" y="3776400"/>
-            <a:ext cx="547920" cy="547920"/>
+            <a:ext cx="547560" cy="547560"/>
           </a:xfrm>
           <a:prstGeom prst="rect">
             <a:avLst/>
@@ -9608,7 +9347,7 @@
         <p:spPr>
           <a:xfrm>
             <a:off x="1124640" y="3749040"/>
-            <a:ext cx="3245400" cy="346680"/>
+            <a:ext cx="3245040" cy="346320"/>
           </a:xfrm>
           <a:prstGeom prst="rect">
             <a:avLst/>
@@ -9665,7 +9404,7 @@
         <p:spPr>
           <a:xfrm>
             <a:off x="1124640" y="4087440"/>
-            <a:ext cx="3245400" cy="712440"/>
+            <a:ext cx="3245040" cy="712080"/>
           </a:xfrm>
           <a:prstGeom prst="rect">
             <a:avLst/>
@@ -9722,7 +9461,7 @@
         <p:spPr>
           <a:xfrm>
             <a:off x="4800600" y="3684960"/>
-            <a:ext cx="4205520" cy="1169640"/>
+            <a:ext cx="4205160" cy="1169280"/>
           </a:xfrm>
           <a:prstGeom prst="rect">
             <a:avLst/>
@@ -9778,7 +9517,7 @@
         <p:spPr>
           <a:xfrm>
             <a:off x="4800600" y="3684960"/>
-            <a:ext cx="109080" cy="1169640"/>
+            <a:ext cx="108720" cy="1169280"/>
           </a:xfrm>
           <a:prstGeom prst="rect">
             <a:avLst/>
@@ -9827,7 +9566,7 @@
         <p:spPr>
           <a:xfrm>
             <a:off x="5001840" y="3776400"/>
-            <a:ext cx="547920" cy="547920"/>
+            <a:ext cx="547560" cy="547560"/>
           </a:xfrm>
           <a:prstGeom prst="rect">
             <a:avLst/>
@@ -9883,7 +9622,7 @@
         <p:spPr>
           <a:xfrm>
             <a:off x="5605200" y="3749040"/>
-            <a:ext cx="3245400" cy="346680"/>
+            <a:ext cx="3245040" cy="346320"/>
           </a:xfrm>
           <a:prstGeom prst="rect">
             <a:avLst/>
@@ -9940,7 +9679,7 @@
         <p:spPr>
           <a:xfrm>
             <a:off x="5605200" y="4087440"/>
-            <a:ext cx="3245400" cy="712440"/>
+            <a:ext cx="3245040" cy="712080"/>
           </a:xfrm>
           <a:prstGeom prst="rect">
             <a:avLst/>
@@ -10034,7 +9773,7 @@
         <p:spPr>
           <a:xfrm>
             <a:off x="0" y="0"/>
-            <a:ext cx="9143280" cy="959400"/>
+            <a:ext cx="9142920" cy="959040"/>
           </a:xfrm>
           <a:prstGeom prst="rect">
             <a:avLst/>
@@ -10083,7 +9822,7 @@
         <p:spPr>
           <a:xfrm>
             <a:off x="0" y="960120"/>
-            <a:ext cx="9143280" cy="63360"/>
+            <a:ext cx="9142920" cy="63000"/>
           </a:xfrm>
           <a:prstGeom prst="rect">
             <a:avLst/>
@@ -10132,7 +9871,7 @@
         <p:spPr>
           <a:xfrm>
             <a:off x="411480" y="0"/>
-            <a:ext cx="8320320" cy="959400"/>
+            <a:ext cx="8319960" cy="959040"/>
           </a:xfrm>
           <a:prstGeom prst="rect">
             <a:avLst/>
@@ -10189,7 +9928,7 @@
         <p:spPr>
           <a:xfrm>
             <a:off x="365760" y="1188720"/>
-            <a:ext cx="4114080" cy="3611160"/>
+            <a:ext cx="4113720" cy="3610800"/>
           </a:xfrm>
           <a:prstGeom prst="rect">
             <a:avLst/>
@@ -10245,7 +9984,7 @@
         <p:spPr>
           <a:xfrm>
             <a:off x="365760" y="1188720"/>
-            <a:ext cx="4114080" cy="456480"/>
+            <a:ext cx="4113720" cy="456120"/>
           </a:xfrm>
           <a:prstGeom prst="rect">
             <a:avLst/>
@@ -10294,7 +10033,7 @@
         <p:spPr>
           <a:xfrm>
             <a:off x="502920" y="1188720"/>
-            <a:ext cx="3839760" cy="456480"/>
+            <a:ext cx="3839400" cy="456120"/>
           </a:xfrm>
           <a:prstGeom prst="rect">
             <a:avLst/>
@@ -10351,7 +10090,7 @@
         <p:spPr>
           <a:xfrm>
             <a:off x="502920" y="1737360"/>
-            <a:ext cx="3839760" cy="2925360"/>
+            <a:ext cx="3839400" cy="2925000"/>
           </a:xfrm>
           <a:prstGeom prst="rect">
             <a:avLst/>
@@ -10492,7 +10231,7 @@
         <p:spPr>
           <a:xfrm>
             <a:off x="4754880" y="1188720"/>
-            <a:ext cx="4068360" cy="1663560"/>
+            <a:ext cx="4068000" cy="1663200"/>
           </a:xfrm>
           <a:prstGeom prst="rect">
             <a:avLst/>
@@ -10548,7 +10287,7 @@
         <p:spPr>
           <a:xfrm>
             <a:off x="4754880" y="1188720"/>
-            <a:ext cx="4068360" cy="438120"/>
+            <a:ext cx="4068000" cy="437760"/>
           </a:xfrm>
           <a:prstGeom prst="rect">
             <a:avLst/>
@@ -10597,7 +10336,7 @@
         <p:spPr>
           <a:xfrm>
             <a:off x="4864680" y="1188720"/>
-            <a:ext cx="3839760" cy="438120"/>
+            <a:ext cx="3839400" cy="437760"/>
           </a:xfrm>
           <a:prstGeom prst="rect">
             <a:avLst/>
@@ -10664,7 +10403,7 @@
         <p:spPr>
           <a:xfrm>
             <a:off x="4892040" y="1682640"/>
-            <a:ext cx="3794040" cy="273600"/>
+            <a:ext cx="3793680" cy="273240"/>
           </a:xfrm>
           <a:prstGeom prst="rect">
             <a:avLst/>
@@ -10731,7 +10470,7 @@
         <p:spPr>
           <a:xfrm>
             <a:off x="4892040" y="1956960"/>
-            <a:ext cx="3794040" cy="273600"/>
+            <a:ext cx="3793680" cy="273240"/>
           </a:xfrm>
           <a:prstGeom prst="rect">
             <a:avLst/>
@@ -10798,7 +10537,7 @@
         <p:spPr>
           <a:xfrm>
             <a:off x="4892040" y="2231280"/>
-            <a:ext cx="3794040" cy="273600"/>
+            <a:ext cx="3793680" cy="273240"/>
           </a:xfrm>
           <a:prstGeom prst="rect">
             <a:avLst/>
@@ -10865,7 +10604,7 @@
         <p:spPr>
           <a:xfrm>
             <a:off x="4892040" y="2505600"/>
-            <a:ext cx="3794040" cy="273600"/>
+            <a:ext cx="3793680" cy="273240"/>
           </a:xfrm>
           <a:prstGeom prst="rect">
             <a:avLst/>
@@ -10932,7 +10671,7 @@
         <p:spPr>
           <a:xfrm>
             <a:off x="4754880" y="3035880"/>
-            <a:ext cx="4068360" cy="1663560"/>
+            <a:ext cx="4068000" cy="1663200"/>
           </a:xfrm>
           <a:prstGeom prst="rect">
             <a:avLst/>
@@ -10988,7 +10727,7 @@
         <p:spPr>
           <a:xfrm>
             <a:off x="4754880" y="3035880"/>
-            <a:ext cx="4068360" cy="438120"/>
+            <a:ext cx="4068000" cy="437760"/>
           </a:xfrm>
           <a:prstGeom prst="rect">
             <a:avLst/>
@@ -11037,7 +10776,7 @@
         <p:spPr>
           <a:xfrm>
             <a:off x="4864680" y="3035880"/>
-            <a:ext cx="3839760" cy="438120"/>
+            <a:ext cx="3839400" cy="437760"/>
           </a:xfrm>
           <a:prstGeom prst="rect">
             <a:avLst/>
@@ -11104,7 +10843,7 @@
         <p:spPr>
           <a:xfrm>
             <a:off x="4892040" y="3529440"/>
-            <a:ext cx="3794040" cy="273600"/>
+            <a:ext cx="3793680" cy="273240"/>
           </a:xfrm>
           <a:prstGeom prst="rect">
             <a:avLst/>
@@ -11171,7 +10910,7 @@
         <p:spPr>
           <a:xfrm>
             <a:off x="4892040" y="3803760"/>
-            <a:ext cx="3794040" cy="273600"/>
+            <a:ext cx="3793680" cy="273240"/>
           </a:xfrm>
           <a:prstGeom prst="rect">
             <a:avLst/>
@@ -11238,7 +10977,7 @@
         <p:spPr>
           <a:xfrm>
             <a:off x="4892040" y="4078080"/>
-            <a:ext cx="3794040" cy="273600"/>
+            <a:ext cx="3793680" cy="273240"/>
           </a:xfrm>
           <a:prstGeom prst="rect">
             <a:avLst/>
@@ -11305,7 +11044,7 @@
         <p:spPr>
           <a:xfrm>
             <a:off x="4892040" y="4352400"/>
-            <a:ext cx="3794040" cy="273600"/>
+            <a:ext cx="3793680" cy="273240"/>
           </a:xfrm>
           <a:prstGeom prst="rect">
             <a:avLst/>
@@ -11409,7 +11148,7 @@
         <p:spPr>
           <a:xfrm>
             <a:off x="0" y="0"/>
-            <a:ext cx="9143280" cy="913680"/>
+            <a:ext cx="9142920" cy="913320"/>
           </a:xfrm>
           <a:prstGeom prst="rect">
             <a:avLst/>
@@ -11458,7 +11197,7 @@
         <p:spPr>
           <a:xfrm>
             <a:off x="0" y="914400"/>
-            <a:ext cx="9143280" cy="54000"/>
+            <a:ext cx="9142920" cy="53640"/>
           </a:xfrm>
           <a:prstGeom prst="rect">
             <a:avLst/>
@@ -11507,7 +11246,7 @@
         <p:spPr>
           <a:xfrm>
             <a:off x="411480" y="0"/>
-            <a:ext cx="8320320" cy="913680"/>
+            <a:ext cx="8319960" cy="913320"/>
           </a:xfrm>
           <a:prstGeom prst="rect">
             <a:avLst/>
@@ -11564,7 +11303,7 @@
         <p:spPr>
           <a:xfrm>
             <a:off x="320040" y="1051560"/>
-            <a:ext cx="4114080" cy="456480"/>
+            <a:ext cx="4113720" cy="456120"/>
           </a:xfrm>
           <a:prstGeom prst="rect">
             <a:avLst/>
@@ -11613,7 +11352,7 @@
         <p:spPr>
           <a:xfrm>
             <a:off x="320040" y="1051560"/>
-            <a:ext cx="4114080" cy="456480"/>
+            <a:ext cx="4113720" cy="456120"/>
           </a:xfrm>
           <a:prstGeom prst="rect">
             <a:avLst/>
@@ -11680,7 +11419,7 @@
         <p:spPr>
           <a:xfrm>
             <a:off x="320040" y="1645920"/>
-            <a:ext cx="4114080" cy="593640"/>
+            <a:ext cx="4113720" cy="593280"/>
           </a:xfrm>
           <a:prstGeom prst="rect">
             <a:avLst/>
@@ -11729,7 +11468,7 @@
         <p:spPr>
           <a:xfrm>
             <a:off x="457200" y="1682640"/>
-            <a:ext cx="3794040" cy="529560"/>
+            <a:ext cx="3793680" cy="529200"/>
           </a:xfrm>
           <a:prstGeom prst="rect">
             <a:avLst/>
@@ -11825,7 +11564,7 @@
         <p:spPr>
           <a:xfrm>
             <a:off x="320040" y="2313360"/>
-            <a:ext cx="4114080" cy="593640"/>
+            <a:ext cx="4113720" cy="593280"/>
           </a:xfrm>
           <a:prstGeom prst="rect">
             <a:avLst/>
@@ -11874,7 +11613,7 @@
         <p:spPr>
           <a:xfrm>
             <a:off x="457200" y="2350080"/>
-            <a:ext cx="3794040" cy="529560"/>
+            <a:ext cx="3793680" cy="529200"/>
           </a:xfrm>
           <a:prstGeom prst="rect">
             <a:avLst/>
@@ -11970,7 +11709,7 @@
         <p:spPr>
           <a:xfrm>
             <a:off x="320040" y="2980800"/>
-            <a:ext cx="4114080" cy="593640"/>
+            <a:ext cx="4113720" cy="593280"/>
           </a:xfrm>
           <a:prstGeom prst="rect">
             <a:avLst/>
@@ -12019,7 +11758,7 @@
         <p:spPr>
           <a:xfrm>
             <a:off x="457200" y="3017520"/>
-            <a:ext cx="3794040" cy="529560"/>
+            <a:ext cx="3793680" cy="529200"/>
           </a:xfrm>
           <a:prstGeom prst="rect">
             <a:avLst/>
@@ -12115,7 +11854,7 @@
         <p:spPr>
           <a:xfrm>
             <a:off x="320040" y="3648600"/>
-            <a:ext cx="4114080" cy="593640"/>
+            <a:ext cx="4113720" cy="593280"/>
           </a:xfrm>
           <a:prstGeom prst="rect">
             <a:avLst/>
@@ -12164,7 +11903,7 @@
         <p:spPr>
           <a:xfrm>
             <a:off x="457200" y="3684960"/>
-            <a:ext cx="3794040" cy="529560"/>
+            <a:ext cx="3793680" cy="529200"/>
           </a:xfrm>
           <a:prstGeom prst="rect">
             <a:avLst/>
@@ -12260,7 +11999,7 @@
         <p:spPr>
           <a:xfrm>
             <a:off x="320040" y="4316040"/>
-            <a:ext cx="4114080" cy="593640"/>
+            <a:ext cx="4113720" cy="593280"/>
           </a:xfrm>
           <a:prstGeom prst="rect">
             <a:avLst/>
@@ -12309,7 +12048,7 @@
         <p:spPr>
           <a:xfrm>
             <a:off x="457200" y="4352400"/>
-            <a:ext cx="3794040" cy="529560"/>
+            <a:ext cx="3793680" cy="529200"/>
           </a:xfrm>
           <a:prstGeom prst="rect">
             <a:avLst/>
@@ -12405,7 +12144,7 @@
         <p:spPr>
           <a:xfrm>
             <a:off x="4709160" y="1051560"/>
-            <a:ext cx="4114080" cy="456480"/>
+            <a:ext cx="4113720" cy="456120"/>
           </a:xfrm>
           <a:prstGeom prst="rect">
             <a:avLst/>
@@ -12454,7 +12193,7 @@
         <p:spPr>
           <a:xfrm>
             <a:off x="4709160" y="1051560"/>
-            <a:ext cx="4114080" cy="456480"/>
+            <a:ext cx="4113720" cy="456120"/>
           </a:xfrm>
           <a:prstGeom prst="rect">
             <a:avLst/>
@@ -12521,7 +12260,7 @@
         <p:spPr>
           <a:xfrm>
             <a:off x="4709160" y="1645920"/>
-            <a:ext cx="4114080" cy="593640"/>
+            <a:ext cx="4113720" cy="593280"/>
           </a:xfrm>
           <a:prstGeom prst="rect">
             <a:avLst/>
@@ -12570,7 +12309,7 @@
         <p:spPr>
           <a:xfrm>
             <a:off x="4846320" y="1682640"/>
-            <a:ext cx="3794040" cy="529560"/>
+            <a:ext cx="3793680" cy="529200"/>
           </a:xfrm>
           <a:prstGeom prst="rect">
             <a:avLst/>
@@ -12666,7 +12405,7 @@
         <p:spPr>
           <a:xfrm>
             <a:off x="4709160" y="2313360"/>
-            <a:ext cx="4114080" cy="593640"/>
+            <a:ext cx="4113720" cy="593280"/>
           </a:xfrm>
           <a:prstGeom prst="rect">
             <a:avLst/>
@@ -12715,7 +12454,7 @@
         <p:spPr>
           <a:xfrm>
             <a:off x="4846320" y="2350080"/>
-            <a:ext cx="3794040" cy="529560"/>
+            <a:ext cx="3793680" cy="529200"/>
           </a:xfrm>
           <a:prstGeom prst="rect">
             <a:avLst/>
@@ -12811,7 +12550,7 @@
         <p:spPr>
           <a:xfrm>
             <a:off x="4709160" y="2980800"/>
-            <a:ext cx="4114080" cy="593640"/>
+            <a:ext cx="4113720" cy="593280"/>
           </a:xfrm>
           <a:prstGeom prst="rect">
             <a:avLst/>
@@ -12860,7 +12599,7 @@
         <p:spPr>
           <a:xfrm>
             <a:off x="4846320" y="3017520"/>
-            <a:ext cx="3794040" cy="529560"/>
+            <a:ext cx="3793680" cy="529200"/>
           </a:xfrm>
           <a:prstGeom prst="rect">
             <a:avLst/>
@@ -12956,7 +12695,7 @@
         <p:spPr>
           <a:xfrm>
             <a:off x="4709160" y="3648600"/>
-            <a:ext cx="4114080" cy="593640"/>
+            <a:ext cx="4113720" cy="593280"/>
           </a:xfrm>
           <a:prstGeom prst="rect">
             <a:avLst/>
@@ -13005,7 +12744,7 @@
         <p:spPr>
           <a:xfrm>
             <a:off x="4846320" y="3684960"/>
-            <a:ext cx="3794040" cy="529560"/>
+            <a:ext cx="3793680" cy="529200"/>
           </a:xfrm>
           <a:prstGeom prst="rect">
             <a:avLst/>
@@ -13101,7 +12840,7 @@
         <p:spPr>
           <a:xfrm>
             <a:off x="4709160" y="4316040"/>
-            <a:ext cx="4114080" cy="593640"/>
+            <a:ext cx="4113720" cy="593280"/>
           </a:xfrm>
           <a:prstGeom prst="rect">
             <a:avLst/>
@@ -13150,7 +12889,7 @@
         <p:spPr>
           <a:xfrm>
             <a:off x="4846320" y="4352400"/>
-            <a:ext cx="3794040" cy="529560"/>
+            <a:ext cx="3793680" cy="529200"/>
           </a:xfrm>
           <a:prstGeom prst="rect">
             <a:avLst/>
@@ -13283,7 +13022,7 @@
         <p:spPr>
           <a:xfrm>
             <a:off x="0" y="0"/>
-            <a:ext cx="9143280" cy="959400"/>
+            <a:ext cx="9142920" cy="959040"/>
           </a:xfrm>
           <a:prstGeom prst="rect">
             <a:avLst/>
@@ -13332,7 +13071,7 @@
         <p:spPr>
           <a:xfrm>
             <a:off x="0" y="960120"/>
-            <a:ext cx="9143280" cy="63360"/>
+            <a:ext cx="9142920" cy="63000"/>
           </a:xfrm>
           <a:prstGeom prst="rect">
             <a:avLst/>
@@ -13381,7 +13120,7 @@
         <p:spPr>
           <a:xfrm>
             <a:off x="411480" y="0"/>
-            <a:ext cx="8320320" cy="959400"/>
+            <a:ext cx="8319960" cy="959040"/>
           </a:xfrm>
           <a:prstGeom prst="rect">
             <a:avLst/>
@@ -13438,7 +13177,7 @@
         <p:spPr>
           <a:xfrm>
             <a:off x="365760" y="1143000"/>
-            <a:ext cx="3656880" cy="346680"/>
+            <a:ext cx="3656520" cy="346320"/>
           </a:xfrm>
           <a:prstGeom prst="rect">
             <a:avLst/>
@@ -13487,7 +13226,7 @@
         <p:spPr>
           <a:xfrm>
             <a:off x="365760" y="1143000"/>
-            <a:ext cx="3656880" cy="346680"/>
+            <a:ext cx="3656520" cy="346320"/>
           </a:xfrm>
           <a:prstGeom prst="rect">
             <a:avLst/>
@@ -13544,7 +13283,7 @@
         <p:spPr>
           <a:xfrm>
             <a:off x="365760" y="1527120"/>
-            <a:ext cx="5028480" cy="273600"/>
+            <a:ext cx="5028120" cy="273240"/>
           </a:xfrm>
           <a:prstGeom prst="rect">
             <a:avLst/>
@@ -13601,7 +13340,7 @@
         <p:spPr>
           <a:xfrm>
             <a:off x="365760" y="1920240"/>
-            <a:ext cx="4205520" cy="867960"/>
+            <a:ext cx="4205160" cy="867600"/>
           </a:xfrm>
           <a:prstGeom prst="rect">
             <a:avLst/>
@@ -13657,7 +13396,7 @@
         <p:spPr>
           <a:xfrm>
             <a:off x="475560" y="2084760"/>
-            <a:ext cx="474840" cy="474840"/>
+            <a:ext cx="474480" cy="474480"/>
           </a:xfrm>
           <a:prstGeom prst="ellipse">
             <a:avLst/>
@@ -13706,7 +13445,7 @@
         <p:spPr>
           <a:xfrm>
             <a:off x="475560" y="2084760"/>
-            <a:ext cx="474840" cy="474840"/>
+            <a:ext cx="474480" cy="474480"/>
           </a:xfrm>
           <a:prstGeom prst="rect">
             <a:avLst/>
@@ -13762,7 +13501,7 @@
         <p:spPr>
           <a:xfrm>
             <a:off x="1051560" y="1993320"/>
-            <a:ext cx="3400920" cy="310320"/>
+            <a:ext cx="3400560" cy="309960"/>
           </a:xfrm>
           <a:prstGeom prst="rect">
             <a:avLst/>
@@ -13819,7 +13558,7 @@
         <p:spPr>
           <a:xfrm>
             <a:off x="1051560" y="2313360"/>
-            <a:ext cx="3400920" cy="410760"/>
+            <a:ext cx="3400560" cy="410400"/>
           </a:xfrm>
           <a:prstGeom prst="rect">
             <a:avLst/>
@@ -13876,7 +13615,7 @@
         <p:spPr>
           <a:xfrm>
             <a:off x="4800600" y="1920240"/>
-            <a:ext cx="4205520" cy="867960"/>
+            <a:ext cx="4205160" cy="867600"/>
           </a:xfrm>
           <a:prstGeom prst="rect">
             <a:avLst/>
@@ -13932,7 +13671,7 @@
         <p:spPr>
           <a:xfrm>
             <a:off x="4910400" y="2084760"/>
-            <a:ext cx="474840" cy="474840"/>
+            <a:ext cx="474480" cy="474480"/>
           </a:xfrm>
           <a:prstGeom prst="ellipse">
             <a:avLst/>
@@ -13981,7 +13720,7 @@
         <p:spPr>
           <a:xfrm>
             <a:off x="4910400" y="2084760"/>
-            <a:ext cx="474840" cy="474840"/>
+            <a:ext cx="474480" cy="474480"/>
           </a:xfrm>
           <a:prstGeom prst="rect">
             <a:avLst/>
@@ -14037,7 +13776,7 @@
         <p:spPr>
           <a:xfrm>
             <a:off x="5486400" y="1993320"/>
-            <a:ext cx="3400920" cy="310320"/>
+            <a:ext cx="3400560" cy="309960"/>
           </a:xfrm>
           <a:prstGeom prst="rect">
             <a:avLst/>
@@ -14094,7 +13833,7 @@
         <p:spPr>
           <a:xfrm>
             <a:off x="5486400" y="2313360"/>
-            <a:ext cx="3400920" cy="410760"/>
+            <a:ext cx="3400560" cy="410400"/>
           </a:xfrm>
           <a:prstGeom prst="rect">
             <a:avLst/>
@@ -14151,7 +13890,7 @@
         <p:spPr>
           <a:xfrm>
             <a:off x="365760" y="2926080"/>
-            <a:ext cx="4205520" cy="867960"/>
+            <a:ext cx="4205160" cy="867600"/>
           </a:xfrm>
           <a:prstGeom prst="rect">
             <a:avLst/>
@@ -14207,7 +13946,7 @@
         <p:spPr>
           <a:xfrm>
             <a:off x="475560" y="3090600"/>
-            <a:ext cx="474840" cy="474840"/>
+            <a:ext cx="474480" cy="474480"/>
           </a:xfrm>
           <a:prstGeom prst="ellipse">
             <a:avLst/>
@@ -14256,7 +13995,7 @@
         <p:spPr>
           <a:xfrm>
             <a:off x="475560" y="3090600"/>
-            <a:ext cx="474840" cy="474840"/>
+            <a:ext cx="474480" cy="474480"/>
           </a:xfrm>
           <a:prstGeom prst="rect">
             <a:avLst/>
@@ -14312,7 +14051,7 @@
         <p:spPr>
           <a:xfrm>
             <a:off x="1051560" y="2999160"/>
-            <a:ext cx="3400920" cy="310320"/>
+            <a:ext cx="3400560" cy="309960"/>
           </a:xfrm>
           <a:prstGeom prst="rect">
             <a:avLst/>
@@ -14369,7 +14108,7 @@
         <p:spPr>
           <a:xfrm>
             <a:off x="1051560" y="3319200"/>
-            <a:ext cx="3400920" cy="410760"/>
+            <a:ext cx="3400560" cy="410400"/>
           </a:xfrm>
           <a:prstGeom prst="rect">
             <a:avLst/>
@@ -14426,7 +14165,7 @@
         <p:spPr>
           <a:xfrm>
             <a:off x="4800600" y="2926080"/>
-            <a:ext cx="4205520" cy="867960"/>
+            <a:ext cx="4205160" cy="867600"/>
           </a:xfrm>
           <a:prstGeom prst="rect">
             <a:avLst/>
@@ -14482,7 +14221,7 @@
         <p:spPr>
           <a:xfrm>
             <a:off x="4910400" y="3090600"/>
-            <a:ext cx="474840" cy="474840"/>
+            <a:ext cx="474480" cy="474480"/>
           </a:xfrm>
           <a:prstGeom prst="ellipse">
             <a:avLst/>
@@ -14531,7 +14270,7 @@
         <p:spPr>
           <a:xfrm>
             <a:off x="4910400" y="3090600"/>
-            <a:ext cx="474840" cy="474840"/>
+            <a:ext cx="474480" cy="474480"/>
           </a:xfrm>
           <a:prstGeom prst="rect">
             <a:avLst/>
@@ -14587,7 +14326,7 @@
         <p:spPr>
           <a:xfrm>
             <a:off x="5486400" y="2999160"/>
-            <a:ext cx="3400920" cy="310320"/>
+            <a:ext cx="3400560" cy="309960"/>
           </a:xfrm>
           <a:prstGeom prst="rect">
             <a:avLst/>
@@ -14644,7 +14383,7 @@
         <p:spPr>
           <a:xfrm>
             <a:off x="5486400" y="3319200"/>
-            <a:ext cx="3400920" cy="410760"/>
+            <a:ext cx="3400560" cy="410400"/>
           </a:xfrm>
           <a:prstGeom prst="rect">
             <a:avLst/>
@@ -14701,7 +14440,7 @@
         <p:spPr>
           <a:xfrm>
             <a:off x="365760" y="3931920"/>
-            <a:ext cx="4205520" cy="867960"/>
+            <a:ext cx="4205160" cy="867600"/>
           </a:xfrm>
           <a:prstGeom prst="rect">
             <a:avLst/>
@@ -14757,7 +14496,7 @@
         <p:spPr>
           <a:xfrm>
             <a:off x="475560" y="4096440"/>
-            <a:ext cx="474840" cy="474840"/>
+            <a:ext cx="474480" cy="474480"/>
           </a:xfrm>
           <a:prstGeom prst="ellipse">
             <a:avLst/>
@@ -14806,7 +14545,7 @@
         <p:spPr>
           <a:xfrm>
             <a:off x="475560" y="4096440"/>
-            <a:ext cx="474840" cy="474840"/>
+            <a:ext cx="474480" cy="474480"/>
           </a:xfrm>
           <a:prstGeom prst="rect">
             <a:avLst/>
@@ -14862,7 +14601,7 @@
         <p:spPr>
           <a:xfrm>
             <a:off x="1051560" y="4005000"/>
-            <a:ext cx="3400920" cy="310320"/>
+            <a:ext cx="3400560" cy="309960"/>
           </a:xfrm>
           <a:prstGeom prst="rect">
             <a:avLst/>
@@ -14919,7 +14658,7 @@
         <p:spPr>
           <a:xfrm>
             <a:off x="1051560" y="4325040"/>
-            <a:ext cx="3400920" cy="410760"/>
+            <a:ext cx="3400560" cy="410400"/>
           </a:xfrm>
           <a:prstGeom prst="rect">
             <a:avLst/>
@@ -14976,7 +14715,7 @@
         <p:spPr>
           <a:xfrm>
             <a:off x="4800600" y="3931920"/>
-            <a:ext cx="4205520" cy="867960"/>
+            <a:ext cx="4205160" cy="867600"/>
           </a:xfrm>
           <a:prstGeom prst="rect">
             <a:avLst/>
@@ -15032,7 +14771,7 @@
         <p:spPr>
           <a:xfrm>
             <a:off x="4910400" y="4096440"/>
-            <a:ext cx="474840" cy="474840"/>
+            <a:ext cx="474480" cy="474480"/>
           </a:xfrm>
           <a:prstGeom prst="ellipse">
             <a:avLst/>
@@ -15081,7 +14820,7 @@
         <p:spPr>
           <a:xfrm>
             <a:off x="4910400" y="4096440"/>
-            <a:ext cx="474840" cy="474840"/>
+            <a:ext cx="474480" cy="474480"/>
           </a:xfrm>
           <a:prstGeom prst="rect">
             <a:avLst/>
@@ -15137,7 +14876,7 @@
         <p:spPr>
           <a:xfrm>
             <a:off x="5486400" y="4005000"/>
-            <a:ext cx="3400920" cy="310320"/>
+            <a:ext cx="3400560" cy="309960"/>
           </a:xfrm>
           <a:prstGeom prst="rect">
             <a:avLst/>
@@ -15194,7 +14933,7 @@
         <p:spPr>
           <a:xfrm>
             <a:off x="5486400" y="4325040"/>
-            <a:ext cx="3400920" cy="410760"/>
+            <a:ext cx="3400560" cy="410400"/>
           </a:xfrm>
           <a:prstGeom prst="rect">
             <a:avLst/>
@@ -15288,7 +15027,7 @@
         <p:spPr>
           <a:xfrm>
             <a:off x="6217920" y="-914400"/>
-            <a:ext cx="4388400" cy="4388400"/>
+            <a:ext cx="4388040" cy="4388040"/>
           </a:xfrm>
           <a:prstGeom prst="ellipse">
             <a:avLst/>
@@ -15337,7 +15076,7 @@
         <p:spPr>
           <a:xfrm>
             <a:off x="-914400" y="3291840"/>
-            <a:ext cx="3199680" cy="3199680"/>
+            <a:ext cx="3199320" cy="3199320"/>
           </a:xfrm>
           <a:prstGeom prst="ellipse">
             <a:avLst/>
@@ -15390,7 +15129,7 @@
         <p:spPr>
           <a:xfrm>
             <a:off x="0" y="0"/>
-            <a:ext cx="182160" cy="5142960"/>
+            <a:ext cx="181800" cy="5142600"/>
           </a:xfrm>
           <a:prstGeom prst="rect">
             <a:avLst/>
@@ -15439,7 +15178,7 @@
         <p:spPr>
           <a:xfrm>
             <a:off x="438840" y="274320"/>
-            <a:ext cx="8228880" cy="593640"/>
+            <a:ext cx="8228520" cy="593280"/>
           </a:xfrm>
           <a:prstGeom prst="rect">
             <a:avLst/>
@@ -15496,7 +15235,7 @@
         <p:spPr>
           <a:xfrm>
             <a:off x="438840" y="868680"/>
-            <a:ext cx="4571280" cy="273600"/>
+            <a:ext cx="4570920" cy="273240"/>
           </a:xfrm>
           <a:prstGeom prst="rect">
             <a:avLst/>
@@ -15533,7 +15272,7 @@
                 <a:latin typeface="Calibri"/>
                 <a:ea typeface="Calibri"/>
               </a:rPr>
-              <a:t>Data Mining — Investopedia</a:t>
+              <a:t>Data Mining</a:t>
             </a:r>
             <a:endParaRPr b="0" lang="en-US" sz="1200" spc="-1" strike="noStrike">
               <a:solidFill>
@@ -15553,7 +15292,7 @@
         <p:spPr>
           <a:xfrm>
             <a:off x="438840" y="1398960"/>
-            <a:ext cx="346680" cy="346680"/>
+            <a:ext cx="346320" cy="346320"/>
           </a:xfrm>
           <a:prstGeom prst="ellipse">
             <a:avLst/>
@@ -15602,7 +15341,7 @@
         <p:spPr>
           <a:xfrm>
             <a:off x="438840" y="1398960"/>
-            <a:ext cx="346680" cy="346680"/>
+            <a:ext cx="346320" cy="346320"/>
           </a:xfrm>
           <a:prstGeom prst="rect">
             <a:avLst/>
@@ -15658,7 +15397,7 @@
         <p:spPr>
           <a:xfrm>
             <a:off x="932760" y="1362600"/>
-            <a:ext cx="7771680" cy="456480"/>
+            <a:ext cx="7771320" cy="456120"/>
           </a:xfrm>
           <a:prstGeom prst="rect">
             <a:avLst/>
@@ -15715,7 +15454,7 @@
         <p:spPr>
           <a:xfrm>
             <a:off x="438840" y="1993320"/>
-            <a:ext cx="346680" cy="346680"/>
+            <a:ext cx="346320" cy="346320"/>
           </a:xfrm>
           <a:prstGeom prst="ellipse">
             <a:avLst/>
@@ -15764,7 +15503,7 @@
         <p:spPr>
           <a:xfrm>
             <a:off x="438840" y="1993320"/>
-            <a:ext cx="346680" cy="346680"/>
+            <a:ext cx="346320" cy="346320"/>
           </a:xfrm>
           <a:prstGeom prst="rect">
             <a:avLst/>
@@ -15820,7 +15559,7 @@
         <p:spPr>
           <a:xfrm>
             <a:off x="932760" y="1956960"/>
-            <a:ext cx="7771680" cy="456480"/>
+            <a:ext cx="7771320" cy="456120"/>
           </a:xfrm>
           <a:prstGeom prst="rect">
             <a:avLst/>
@@ -15877,7 +15616,7 @@
         <p:spPr>
           <a:xfrm>
             <a:off x="438840" y="2587680"/>
-            <a:ext cx="346680" cy="346680"/>
+            <a:ext cx="346320" cy="346320"/>
           </a:xfrm>
           <a:prstGeom prst="ellipse">
             <a:avLst/>
@@ -15926,7 +15665,7 @@
         <p:spPr>
           <a:xfrm>
             <a:off x="438840" y="2587680"/>
-            <a:ext cx="346680" cy="346680"/>
+            <a:ext cx="346320" cy="346320"/>
           </a:xfrm>
           <a:prstGeom prst="rect">
             <a:avLst/>
@@ -15982,7 +15721,7 @@
         <p:spPr>
           <a:xfrm>
             <a:off x="932760" y="2551320"/>
-            <a:ext cx="7771680" cy="456480"/>
+            <a:ext cx="7771320" cy="456120"/>
           </a:xfrm>
           <a:prstGeom prst="rect">
             <a:avLst/>
@@ -16039,7 +15778,7 @@
         <p:spPr>
           <a:xfrm>
             <a:off x="438840" y="3182040"/>
-            <a:ext cx="346680" cy="346680"/>
+            <a:ext cx="346320" cy="346320"/>
           </a:xfrm>
           <a:prstGeom prst="ellipse">
             <a:avLst/>
@@ -16088,7 +15827,7 @@
         <p:spPr>
           <a:xfrm>
             <a:off x="438840" y="3182040"/>
-            <a:ext cx="346680" cy="346680"/>
+            <a:ext cx="346320" cy="346320"/>
           </a:xfrm>
           <a:prstGeom prst="rect">
             <a:avLst/>
@@ -16144,7 +15883,7 @@
         <p:spPr>
           <a:xfrm>
             <a:off x="932760" y="3145680"/>
-            <a:ext cx="7771680" cy="456480"/>
+            <a:ext cx="7771320" cy="456120"/>
           </a:xfrm>
           <a:prstGeom prst="rect">
             <a:avLst/>
@@ -16201,7 +15940,7 @@
         <p:spPr>
           <a:xfrm>
             <a:off x="438840" y="3776400"/>
-            <a:ext cx="346680" cy="346680"/>
+            <a:ext cx="346320" cy="346320"/>
           </a:xfrm>
           <a:prstGeom prst="ellipse">
             <a:avLst/>
@@ -16250,7 +15989,7 @@
         <p:spPr>
           <a:xfrm>
             <a:off x="438840" y="3776400"/>
-            <a:ext cx="346680" cy="346680"/>
+            <a:ext cx="346320" cy="346320"/>
           </a:xfrm>
           <a:prstGeom prst="rect">
             <a:avLst/>
@@ -16306,7 +16045,7 @@
         <p:spPr>
           <a:xfrm>
             <a:off x="932760" y="3740040"/>
-            <a:ext cx="7771680" cy="456480"/>
+            <a:ext cx="7771320" cy="456120"/>
           </a:xfrm>
           <a:prstGeom prst="rect">
             <a:avLst/>
@@ -16363,7 +16102,7 @@
         <p:spPr>
           <a:xfrm>
             <a:off x="438840" y="4370760"/>
-            <a:ext cx="346680" cy="346680"/>
+            <a:ext cx="346320" cy="346320"/>
           </a:xfrm>
           <a:prstGeom prst="ellipse">
             <a:avLst/>
@@ -16412,7 +16151,7 @@
         <p:spPr>
           <a:xfrm>
             <a:off x="438840" y="4370760"/>
-            <a:ext cx="346680" cy="346680"/>
+            <a:ext cx="346320" cy="346320"/>
           </a:xfrm>
           <a:prstGeom prst="rect">
             <a:avLst/>
@@ -16468,7 +16207,7 @@
         <p:spPr>
           <a:xfrm>
             <a:off x="932760" y="4334400"/>
-            <a:ext cx="7771680" cy="456480"/>
+            <a:ext cx="7771320" cy="456120"/>
           </a:xfrm>
           <a:prstGeom prst="rect">
             <a:avLst/>
@@ -16525,7 +16264,7 @@
         <p:spPr>
           <a:xfrm>
             <a:off x="438840" y="4645080"/>
-            <a:ext cx="8320320" cy="383400"/>
+            <a:ext cx="8319960" cy="383040"/>
           </a:xfrm>
           <a:prstGeom prst="rect">
             <a:avLst/>
@@ -16574,7 +16313,7 @@
         <p:spPr>
           <a:xfrm>
             <a:off x="438840" y="4645080"/>
-            <a:ext cx="8320320" cy="383400"/>
+            <a:ext cx="8319960" cy="383040"/>
           </a:xfrm>
           <a:prstGeom prst="rect">
             <a:avLst/>

--- a/Data Mining and Analytics -21CSE355T/Unit-5/PPT/Data_Mining_approaches.pptx
+++ b/Data Mining and Analytics -21CSE355T/Unit-5/PPT/Data_Mining_approaches.pptx
@@ -125,16 +125,7 @@
                 </a:solidFill>
                 <a:latin typeface="Arial"/>
               </a:rPr>
-              <a:t>Click to edit the </a:t>
-            </a:r>
-            <a:r>
-              <a:rPr b="0" lang="en-US" sz="2000" spc="-1" strike="noStrike">
-                <a:solidFill>
-                  <a:srgbClr val="000000"/>
-                </a:solidFill>
-                <a:latin typeface="Arial"/>
-              </a:rPr>
-              <a:t>notes format</a:t>
+              <a:t>Click to edit the notes format</a:t>
             </a:r>
             <a:endParaRPr b="0" lang="en-US" sz="2000" spc="-1" strike="noStrike">
               <a:solidFill>
@@ -356,7 +347,7 @@
             <a:pPr indent="0" algn="r">
               <a:buNone/>
             </a:pPr>
-            <a:fld id="{8A7F89D0-60B7-41CC-84CF-A75CE4BBDEDE}" type="slidenum">
+            <a:fld id="{E3ADA162-7F12-4F46-8442-6381ACA4A45B}" type="slidenum">
               <a:rPr b="0" lang="en-US" sz="1400" spc="-1" strike="noStrike">
                 <a:solidFill>
                   <a:srgbClr val="000000"/>
@@ -410,7 +401,7 @@
         <p:spPr>
           <a:xfrm>
             <a:off x="685800" y="1143000"/>
-            <a:ext cx="5485320" cy="3085200"/>
+            <a:ext cx="5484960" cy="3084840"/>
           </a:xfrm>
           <a:prstGeom prst="rect">
             <a:avLst/>
@@ -433,7 +424,7 @@
         <p:spPr>
           <a:xfrm>
             <a:off x="685800" y="4400640"/>
-            <a:ext cx="5485320" cy="3599280"/>
+            <a:ext cx="5484960" cy="3598920"/>
           </a:xfrm>
           <a:prstGeom prst="rect">
             <a:avLst/>
@@ -473,7 +464,7 @@
         <p:spPr>
           <a:xfrm>
             <a:off x="3884760" y="8685360"/>
-            <a:ext cx="2970720" cy="457560"/>
+            <a:ext cx="2970360" cy="457200"/>
           </a:xfrm>
           <a:prstGeom prst="rect">
             <a:avLst/>
@@ -515,7 +506,7 @@
                 <a:tab algn="l" pos="0"/>
               </a:tabLst>
             </a:pPr>
-            <a:fld id="{1564A601-F2B9-4185-9673-1D0D4AC28101}" type="slidenum">
+            <a:fld id="{B2E1F45C-5A8B-4A2C-B11B-89A84FED65E2}" type="slidenum">
               <a:rPr b="0" lang="en-US" sz="1200" spc="-1" strike="noStrike">
                 <a:solidFill>
                   <a:schemeClr val="dk1"/>
@@ -569,7 +560,7 @@
         <p:spPr>
           <a:xfrm>
             <a:off x="685800" y="1143000"/>
-            <a:ext cx="5485320" cy="3085200"/>
+            <a:ext cx="5484960" cy="3084840"/>
           </a:xfrm>
           <a:prstGeom prst="rect">
             <a:avLst/>
@@ -592,7 +583,7 @@
         <p:spPr>
           <a:xfrm>
             <a:off x="685800" y="4400640"/>
-            <a:ext cx="5485320" cy="3599280"/>
+            <a:ext cx="5484960" cy="3598920"/>
           </a:xfrm>
           <a:prstGeom prst="rect">
             <a:avLst/>
@@ -632,7 +623,7 @@
         <p:spPr>
           <a:xfrm>
             <a:off x="3884760" y="8685360"/>
-            <a:ext cx="2970720" cy="457560"/>
+            <a:ext cx="2970360" cy="457200"/>
           </a:xfrm>
           <a:prstGeom prst="rect">
             <a:avLst/>
@@ -674,7 +665,7 @@
                 <a:tab algn="l" pos="0"/>
               </a:tabLst>
             </a:pPr>
-            <a:fld id="{579A9D08-B73E-4809-BEA8-DABEA1A9375F}" type="slidenum">
+            <a:fld id="{38FAD0BC-6DDC-4EEB-AFBB-CD4CF67DA16C}" type="slidenum">
               <a:rPr b="0" lang="en-US" sz="1200" spc="-1" strike="noStrike">
                 <a:solidFill>
                   <a:schemeClr val="dk1"/>
@@ -728,7 +719,7 @@
         <p:spPr>
           <a:xfrm>
             <a:off x="685800" y="1143000"/>
-            <a:ext cx="5485320" cy="3085200"/>
+            <a:ext cx="5484960" cy="3084840"/>
           </a:xfrm>
           <a:prstGeom prst="rect">
             <a:avLst/>
@@ -751,7 +742,7 @@
         <p:spPr>
           <a:xfrm>
             <a:off x="685800" y="4400640"/>
-            <a:ext cx="5485320" cy="3599280"/>
+            <a:ext cx="5484960" cy="3598920"/>
           </a:xfrm>
           <a:prstGeom prst="rect">
             <a:avLst/>
@@ -791,7 +782,7 @@
         <p:spPr>
           <a:xfrm>
             <a:off x="3884760" y="8685360"/>
-            <a:ext cx="2970720" cy="457560"/>
+            <a:ext cx="2970360" cy="457200"/>
           </a:xfrm>
           <a:prstGeom prst="rect">
             <a:avLst/>
@@ -833,7 +824,7 @@
                 <a:tab algn="l" pos="0"/>
               </a:tabLst>
             </a:pPr>
-            <a:fld id="{EDA26A53-CA1F-4AFE-9BAD-86440706FE4A}" type="slidenum">
+            <a:fld id="{C4E8408E-77C1-4C3A-B521-277DECDA7226}" type="slidenum">
               <a:rPr b="0" lang="en-US" sz="1200" spc="-1" strike="noStrike">
                 <a:solidFill>
                   <a:schemeClr val="dk1"/>
@@ -887,7 +878,7 @@
         <p:spPr>
           <a:xfrm>
             <a:off x="685800" y="1143000"/>
-            <a:ext cx="5485320" cy="3085200"/>
+            <a:ext cx="5484960" cy="3084840"/>
           </a:xfrm>
           <a:prstGeom prst="rect">
             <a:avLst/>
@@ -910,7 +901,7 @@
         <p:spPr>
           <a:xfrm>
             <a:off x="685800" y="4400640"/>
-            <a:ext cx="5485320" cy="3599280"/>
+            <a:ext cx="5484960" cy="3598920"/>
           </a:xfrm>
           <a:prstGeom prst="rect">
             <a:avLst/>
@@ -950,7 +941,7 @@
         <p:spPr>
           <a:xfrm>
             <a:off x="3884760" y="8685360"/>
-            <a:ext cx="2970720" cy="457560"/>
+            <a:ext cx="2970360" cy="457200"/>
           </a:xfrm>
           <a:prstGeom prst="rect">
             <a:avLst/>
@@ -992,7 +983,7 @@
                 <a:tab algn="l" pos="0"/>
               </a:tabLst>
             </a:pPr>
-            <a:fld id="{A570320B-DBE1-4162-B8AC-7A8353D4878D}" type="slidenum">
+            <a:fld id="{569A25E0-3C7D-4CC8-8C2F-4563C77C94E3}" type="slidenum">
               <a:rPr b="0" lang="en-US" sz="1200" spc="-1" strike="noStrike">
                 <a:solidFill>
                   <a:schemeClr val="dk1"/>
@@ -1046,7 +1037,7 @@
         <p:spPr>
           <a:xfrm>
             <a:off x="685800" y="1143000"/>
-            <a:ext cx="5485320" cy="3085200"/>
+            <a:ext cx="5484960" cy="3084840"/>
           </a:xfrm>
           <a:prstGeom prst="rect">
             <a:avLst/>
@@ -1069,7 +1060,7 @@
         <p:spPr>
           <a:xfrm>
             <a:off x="685800" y="4400640"/>
-            <a:ext cx="5485320" cy="3599280"/>
+            <a:ext cx="5484960" cy="3598920"/>
           </a:xfrm>
           <a:prstGeom prst="rect">
             <a:avLst/>
@@ -1109,7 +1100,7 @@
         <p:spPr>
           <a:xfrm>
             <a:off x="3884760" y="8685360"/>
-            <a:ext cx="2970720" cy="457560"/>
+            <a:ext cx="2970360" cy="457200"/>
           </a:xfrm>
           <a:prstGeom prst="rect">
             <a:avLst/>
@@ -1151,7 +1142,7 @@
                 <a:tab algn="l" pos="0"/>
               </a:tabLst>
             </a:pPr>
-            <a:fld id="{587F1176-4363-42FA-99D7-04FDBB14B16B}" type="slidenum">
+            <a:fld id="{B1636B9A-B0FB-443F-9FAB-F426E3FF4533}" type="slidenum">
               <a:rPr b="0" lang="en-US" sz="1200" spc="-1" strike="noStrike">
                 <a:solidFill>
                   <a:schemeClr val="dk1"/>
@@ -1205,7 +1196,7 @@
         <p:spPr>
           <a:xfrm>
             <a:off x="685800" y="1143000"/>
-            <a:ext cx="5485320" cy="3085200"/>
+            <a:ext cx="5484960" cy="3084840"/>
           </a:xfrm>
           <a:prstGeom prst="rect">
             <a:avLst/>
@@ -1228,7 +1219,7 @@
         <p:spPr>
           <a:xfrm>
             <a:off x="685800" y="4400640"/>
-            <a:ext cx="5485320" cy="3599280"/>
+            <a:ext cx="5484960" cy="3598920"/>
           </a:xfrm>
           <a:prstGeom prst="rect">
             <a:avLst/>
@@ -1268,7 +1259,7 @@
         <p:spPr>
           <a:xfrm>
             <a:off x="3884760" y="8685360"/>
-            <a:ext cx="2970720" cy="457560"/>
+            <a:ext cx="2970360" cy="457200"/>
           </a:xfrm>
           <a:prstGeom prst="rect">
             <a:avLst/>
@@ -1310,7 +1301,7 @@
                 <a:tab algn="l" pos="0"/>
               </a:tabLst>
             </a:pPr>
-            <a:fld id="{1270F0E1-4351-43C0-A31A-5B814696A3B4}" type="slidenum">
+            <a:fld id="{B41B5965-7C00-4702-923C-A259B0DBA0DA}" type="slidenum">
               <a:rPr b="0" lang="en-US" sz="1200" spc="-1" strike="noStrike">
                 <a:solidFill>
                   <a:schemeClr val="dk1"/>
@@ -1364,7 +1355,7 @@
         <p:spPr>
           <a:xfrm>
             <a:off x="685800" y="1143000"/>
-            <a:ext cx="5485320" cy="3085200"/>
+            <a:ext cx="5484960" cy="3084840"/>
           </a:xfrm>
           <a:prstGeom prst="rect">
             <a:avLst/>
@@ -1387,7 +1378,7 @@
         <p:spPr>
           <a:xfrm>
             <a:off x="685800" y="4400640"/>
-            <a:ext cx="5485320" cy="3599280"/>
+            <a:ext cx="5484960" cy="3598920"/>
           </a:xfrm>
           <a:prstGeom prst="rect">
             <a:avLst/>
@@ -1427,7 +1418,7 @@
         <p:spPr>
           <a:xfrm>
             <a:off x="3884760" y="8685360"/>
-            <a:ext cx="2970720" cy="457560"/>
+            <a:ext cx="2970360" cy="457200"/>
           </a:xfrm>
           <a:prstGeom prst="rect">
             <a:avLst/>
@@ -1469,7 +1460,7 @@
                 <a:tab algn="l" pos="0"/>
               </a:tabLst>
             </a:pPr>
-            <a:fld id="{97CF4C48-6ED8-4FC1-9EB1-6C5083DA7FC0}" type="slidenum">
+            <a:fld id="{2485D37A-89EC-4F12-90D7-1C746C22076A}" type="slidenum">
               <a:rPr b="0" lang="en-US" sz="1200" spc="-1" strike="noStrike">
                 <a:solidFill>
                   <a:schemeClr val="dk1"/>
@@ -1523,7 +1514,7 @@
         <p:spPr>
           <a:xfrm>
             <a:off x="685800" y="1143000"/>
-            <a:ext cx="5485320" cy="3085200"/>
+            <a:ext cx="5484960" cy="3084840"/>
           </a:xfrm>
           <a:prstGeom prst="rect">
             <a:avLst/>
@@ -1546,7 +1537,7 @@
         <p:spPr>
           <a:xfrm>
             <a:off x="685800" y="4400640"/>
-            <a:ext cx="5485320" cy="3599280"/>
+            <a:ext cx="5484960" cy="3598920"/>
           </a:xfrm>
           <a:prstGeom prst="rect">
             <a:avLst/>
@@ -1586,7 +1577,7 @@
         <p:spPr>
           <a:xfrm>
             <a:off x="3884760" y="8685360"/>
-            <a:ext cx="2970720" cy="457560"/>
+            <a:ext cx="2970360" cy="457200"/>
           </a:xfrm>
           <a:prstGeom prst="rect">
             <a:avLst/>
@@ -1628,7 +1619,7 @@
                 <a:tab algn="l" pos="0"/>
               </a:tabLst>
             </a:pPr>
-            <a:fld id="{2BE118F0-4293-457C-A003-EA66CC697098}" type="slidenum">
+            <a:fld id="{2AB250A8-D9F9-4B0A-8920-6037D27AC50E}" type="slidenum">
               <a:rPr b="0" lang="en-US" sz="1200" spc="-1" strike="noStrike">
                 <a:solidFill>
                   <a:schemeClr val="dk1"/>
@@ -1682,7 +1673,7 @@
         <p:spPr>
           <a:xfrm>
             <a:off x="685800" y="1143000"/>
-            <a:ext cx="5485320" cy="3085200"/>
+            <a:ext cx="5484960" cy="3084840"/>
           </a:xfrm>
           <a:prstGeom prst="rect">
             <a:avLst/>
@@ -1705,7 +1696,7 @@
         <p:spPr>
           <a:xfrm>
             <a:off x="685800" y="4400640"/>
-            <a:ext cx="5485320" cy="3599280"/>
+            <a:ext cx="5484960" cy="3598920"/>
           </a:xfrm>
           <a:prstGeom prst="rect">
             <a:avLst/>
@@ -1745,7 +1736,7 @@
         <p:spPr>
           <a:xfrm>
             <a:off x="3884760" y="8685360"/>
-            <a:ext cx="2970720" cy="457560"/>
+            <a:ext cx="2970360" cy="457200"/>
           </a:xfrm>
           <a:prstGeom prst="rect">
             <a:avLst/>
@@ -1787,7 +1778,7 @@
                 <a:tab algn="l" pos="0"/>
               </a:tabLst>
             </a:pPr>
-            <a:fld id="{1E22FD67-D9AE-4DAC-AF49-73FC3A2DDC79}" type="slidenum">
+            <a:fld id="{F8CBF5EF-A55F-4F4B-B27C-A0FECA7D2433}" type="slidenum">
               <a:rPr b="0" lang="en-US" sz="1200" spc="-1" strike="noStrike">
                 <a:solidFill>
                   <a:schemeClr val="dk1"/>
@@ -2173,7 +2164,7 @@
         <p:spPr>
           <a:xfrm>
             <a:off x="6217920" y="-1371600"/>
-            <a:ext cx="4753800" cy="4753800"/>
+            <a:ext cx="4753440" cy="4753440"/>
           </a:xfrm>
           <a:prstGeom prst="ellipse">
             <a:avLst/>
@@ -2222,7 +2213,7 @@
         <p:spPr>
           <a:xfrm>
             <a:off x="7498080" y="457200"/>
-            <a:ext cx="2284920" cy="2284920"/>
+            <a:ext cx="2284560" cy="2284560"/>
           </a:xfrm>
           <a:prstGeom prst="ellipse">
             <a:avLst/>
@@ -2275,7 +2266,7 @@
         <p:spPr>
           <a:xfrm>
             <a:off x="-1097280" y="3474720"/>
-            <a:ext cx="3473640" cy="3473640"/>
+            <a:ext cx="3473280" cy="3473280"/>
           </a:xfrm>
           <a:prstGeom prst="ellipse">
             <a:avLst/>
@@ -2328,7 +2319,7 @@
         <p:spPr>
           <a:xfrm>
             <a:off x="0" y="0"/>
-            <a:ext cx="181800" cy="5142600"/>
+            <a:ext cx="181440" cy="5142240"/>
           </a:xfrm>
           <a:prstGeom prst="rect">
             <a:avLst/>
@@ -2377,7 +2368,7 @@
         <p:spPr>
           <a:xfrm>
             <a:off x="438840" y="731520"/>
-            <a:ext cx="2650680" cy="364680"/>
+            <a:ext cx="2650320" cy="364320"/>
           </a:xfrm>
           <a:prstGeom prst="rect">
             <a:avLst/>
@@ -2426,7 +2417,7 @@
         <p:spPr>
           <a:xfrm>
             <a:off x="438840" y="731520"/>
-            <a:ext cx="2650680" cy="364680"/>
+            <a:ext cx="2650320" cy="364320"/>
           </a:xfrm>
           <a:prstGeom prst="rect">
             <a:avLst/>
@@ -2456,7 +2447,7 @@
               </a:tabLst>
             </a:pPr>
             <a:r>
-              <a:rPr b="1" lang="en-US" sz="950" spc="143" strike="noStrike">
+              <a:rPr b="1" lang="en-US" sz="950" spc="140" strike="noStrike">
                 <a:solidFill>
                   <a:srgbClr val="0b3d2e"/>
                 </a:solidFill>
@@ -2482,7 +2473,7 @@
         <p:spPr>
           <a:xfrm>
             <a:off x="438840" y="1298520"/>
-            <a:ext cx="8045640" cy="1004760"/>
+            <a:ext cx="8045280" cy="1004400"/>
           </a:xfrm>
           <a:prstGeom prst="rect">
             <a:avLst/>
@@ -2539,7 +2530,7 @@
         <p:spPr>
           <a:xfrm>
             <a:off x="438840" y="2359080"/>
-            <a:ext cx="7131240" cy="1004760"/>
+            <a:ext cx="7130880" cy="1004400"/>
           </a:xfrm>
           <a:prstGeom prst="rect">
             <a:avLst/>
@@ -2622,7 +2613,7 @@
         <p:spPr>
           <a:xfrm>
             <a:off x="438840" y="3547800"/>
-            <a:ext cx="1964880" cy="821880"/>
+            <a:ext cx="1964520" cy="821520"/>
           </a:xfrm>
           <a:prstGeom prst="rect">
             <a:avLst/>
@@ -2671,7 +2662,7 @@
         <p:spPr>
           <a:xfrm>
             <a:off x="438840" y="3547800"/>
-            <a:ext cx="1964880" cy="474480"/>
+            <a:ext cx="1964520" cy="474120"/>
           </a:xfrm>
           <a:prstGeom prst="rect">
             <a:avLst/>
@@ -2728,7 +2719,7 @@
         <p:spPr>
           <a:xfrm>
             <a:off x="438840" y="4023360"/>
-            <a:ext cx="1964880" cy="318960"/>
+            <a:ext cx="1964520" cy="318600"/>
           </a:xfrm>
           <a:prstGeom prst="rect">
             <a:avLst/>
@@ -2785,7 +2776,7 @@
         <p:spPr>
           <a:xfrm>
             <a:off x="2615040" y="3547800"/>
-            <a:ext cx="1964880" cy="821880"/>
+            <a:ext cx="1964520" cy="821520"/>
           </a:xfrm>
           <a:prstGeom prst="rect">
             <a:avLst/>
@@ -2834,7 +2825,7 @@
         <p:spPr>
           <a:xfrm>
             <a:off x="2615040" y="3547800"/>
-            <a:ext cx="1964880" cy="474480"/>
+            <a:ext cx="1964520" cy="474120"/>
           </a:xfrm>
           <a:prstGeom prst="rect">
             <a:avLst/>
@@ -2891,7 +2882,7 @@
         <p:spPr>
           <a:xfrm>
             <a:off x="2615040" y="4023360"/>
-            <a:ext cx="1964880" cy="318960"/>
+            <a:ext cx="1964520" cy="318600"/>
           </a:xfrm>
           <a:prstGeom prst="rect">
             <a:avLst/>
@@ -2948,7 +2939,7 @@
         <p:spPr>
           <a:xfrm>
             <a:off x="4791600" y="3547800"/>
-            <a:ext cx="1964880" cy="821880"/>
+            <a:ext cx="1964520" cy="821520"/>
           </a:xfrm>
           <a:prstGeom prst="rect">
             <a:avLst/>
@@ -2997,7 +2988,7 @@
         <p:spPr>
           <a:xfrm>
             <a:off x="4791600" y="3547800"/>
-            <a:ext cx="1964880" cy="474480"/>
+            <a:ext cx="1964520" cy="474120"/>
           </a:xfrm>
           <a:prstGeom prst="rect">
             <a:avLst/>
@@ -3054,7 +3045,7 @@
         <p:spPr>
           <a:xfrm>
             <a:off x="4791600" y="4023360"/>
-            <a:ext cx="1964880" cy="318960"/>
+            <a:ext cx="1964520" cy="318600"/>
           </a:xfrm>
           <a:prstGeom prst="rect">
             <a:avLst/>
@@ -3111,7 +3102,7 @@
         <p:spPr>
           <a:xfrm>
             <a:off x="6967800" y="3547800"/>
-            <a:ext cx="1964880" cy="821880"/>
+            <a:ext cx="1964520" cy="821520"/>
           </a:xfrm>
           <a:prstGeom prst="rect">
             <a:avLst/>
@@ -3160,7 +3151,7 @@
         <p:spPr>
           <a:xfrm>
             <a:off x="6967800" y="3547800"/>
-            <a:ext cx="1964880" cy="474480"/>
+            <a:ext cx="1964520" cy="474120"/>
           </a:xfrm>
           <a:prstGeom prst="rect">
             <a:avLst/>
@@ -3217,7 +3208,7 @@
         <p:spPr>
           <a:xfrm>
             <a:off x="6967800" y="4023360"/>
-            <a:ext cx="1964880" cy="318960"/>
+            <a:ext cx="1964520" cy="318600"/>
           </a:xfrm>
           <a:prstGeom prst="rect">
             <a:avLst/>
@@ -3274,7 +3265,7 @@
         <p:spPr>
           <a:xfrm>
             <a:off x="438840" y="4709160"/>
-            <a:ext cx="8228520" cy="254880"/>
+            <a:ext cx="8228160" cy="254520"/>
           </a:xfrm>
           <a:prstGeom prst="rect">
             <a:avLst/>
@@ -3358,7 +3349,7 @@
         <p:spPr>
           <a:xfrm>
             <a:off x="0" y="0"/>
-            <a:ext cx="9142920" cy="959040"/>
+            <a:ext cx="9142560" cy="958680"/>
           </a:xfrm>
           <a:prstGeom prst="rect">
             <a:avLst/>
@@ -3407,7 +3398,7 @@
         <p:spPr>
           <a:xfrm>
             <a:off x="0" y="960120"/>
-            <a:ext cx="9142920" cy="63000"/>
+            <a:ext cx="9142560" cy="62640"/>
           </a:xfrm>
           <a:prstGeom prst="rect">
             <a:avLst/>
@@ -3456,7 +3447,7 @@
         <p:spPr>
           <a:xfrm>
             <a:off x="411480" y="0"/>
-            <a:ext cx="8319960" cy="959040"/>
+            <a:ext cx="8319600" cy="958680"/>
           </a:xfrm>
           <a:prstGeom prst="rect">
             <a:avLst/>
@@ -3513,7 +3504,7 @@
         <p:spPr>
           <a:xfrm>
             <a:off x="365760" y="1188720"/>
-            <a:ext cx="8411400" cy="1077840"/>
+            <a:ext cx="8411040" cy="1077480"/>
           </a:xfrm>
           <a:prstGeom prst="rect">
             <a:avLst/>
@@ -3569,7 +3560,7 @@
         <p:spPr>
           <a:xfrm>
             <a:off x="548640" y="1207080"/>
-            <a:ext cx="8045640" cy="1004760"/>
+            <a:ext cx="8045280" cy="1004400"/>
           </a:xfrm>
           <a:prstGeom prst="rect">
             <a:avLst/>
@@ -3656,7 +3647,7 @@
         <p:spPr>
           <a:xfrm>
             <a:off x="365760" y="2359080"/>
-            <a:ext cx="8411400" cy="327960"/>
+            <a:ext cx="8411040" cy="327600"/>
           </a:xfrm>
           <a:prstGeom prst="rect">
             <a:avLst/>
@@ -3713,7 +3704,7 @@
         <p:spPr>
           <a:xfrm>
             <a:off x="347400" y="2816280"/>
-            <a:ext cx="2650680" cy="2083680"/>
+            <a:ext cx="2650320" cy="2083320"/>
           </a:xfrm>
           <a:prstGeom prst="rect">
             <a:avLst/>
@@ -3769,7 +3760,7 @@
         <p:spPr>
           <a:xfrm>
             <a:off x="347400" y="2834640"/>
-            <a:ext cx="2650680" cy="529200"/>
+            <a:ext cx="2650320" cy="528840"/>
           </a:xfrm>
           <a:prstGeom prst="rect">
             <a:avLst/>
@@ -3825,7 +3816,7 @@
         <p:spPr>
           <a:xfrm>
             <a:off x="438840" y="3337560"/>
-            <a:ext cx="2467800" cy="456120"/>
+            <a:ext cx="2467440" cy="455760"/>
           </a:xfrm>
           <a:prstGeom prst="rect">
             <a:avLst/>
@@ -3908,7 +3899,7 @@
         <p:spPr>
           <a:xfrm>
             <a:off x="457200" y="3822120"/>
-            <a:ext cx="2431080" cy="1004760"/>
+            <a:ext cx="2430720" cy="1004400"/>
           </a:xfrm>
           <a:prstGeom prst="rect">
             <a:avLst/>
@@ -3965,7 +3956,7 @@
         <p:spPr>
           <a:xfrm>
             <a:off x="3182040" y="2816280"/>
-            <a:ext cx="2650680" cy="2083680"/>
+            <a:ext cx="2650320" cy="2083320"/>
           </a:xfrm>
           <a:prstGeom prst="rect">
             <a:avLst/>
@@ -4021,7 +4012,7 @@
         <p:spPr>
           <a:xfrm>
             <a:off x="3182040" y="2834640"/>
-            <a:ext cx="2650680" cy="529200"/>
+            <a:ext cx="2650320" cy="528840"/>
           </a:xfrm>
           <a:prstGeom prst="rect">
             <a:avLst/>
@@ -4077,7 +4068,7 @@
         <p:spPr>
           <a:xfrm>
             <a:off x="3273480" y="3337560"/>
-            <a:ext cx="2467800" cy="456120"/>
+            <a:ext cx="2467440" cy="455760"/>
           </a:xfrm>
           <a:prstGeom prst="rect">
             <a:avLst/>
@@ -4160,7 +4151,7 @@
         <p:spPr>
           <a:xfrm>
             <a:off x="3291840" y="3822120"/>
-            <a:ext cx="2431080" cy="1004760"/>
+            <a:ext cx="2430720" cy="1004400"/>
           </a:xfrm>
           <a:prstGeom prst="rect">
             <a:avLst/>
@@ -4217,7 +4208,7 @@
         <p:spPr>
           <a:xfrm>
             <a:off x="6016680" y="2816280"/>
-            <a:ext cx="2650680" cy="2083680"/>
+            <a:ext cx="2650320" cy="2083320"/>
           </a:xfrm>
           <a:prstGeom prst="rect">
             <a:avLst/>
@@ -4273,7 +4264,7 @@
         <p:spPr>
           <a:xfrm>
             <a:off x="6016680" y="2834640"/>
-            <a:ext cx="2650680" cy="529200"/>
+            <a:ext cx="2650320" cy="528840"/>
           </a:xfrm>
           <a:prstGeom prst="rect">
             <a:avLst/>
@@ -4329,7 +4320,7 @@
         <p:spPr>
           <a:xfrm>
             <a:off x="6108120" y="3337560"/>
-            <a:ext cx="2467800" cy="456120"/>
+            <a:ext cx="2467440" cy="455760"/>
           </a:xfrm>
           <a:prstGeom prst="rect">
             <a:avLst/>
@@ -4412,7 +4403,7 @@
         <p:spPr>
           <a:xfrm>
             <a:off x="6126480" y="3822120"/>
-            <a:ext cx="2431080" cy="1004760"/>
+            <a:ext cx="2430720" cy="1004400"/>
           </a:xfrm>
           <a:prstGeom prst="rect">
             <a:avLst/>
@@ -4506,7 +4497,7 @@
         <p:spPr>
           <a:xfrm>
             <a:off x="0" y="0"/>
-            <a:ext cx="9142920" cy="913320"/>
+            <a:ext cx="9142560" cy="912960"/>
           </a:xfrm>
           <a:prstGeom prst="rect">
             <a:avLst/>
@@ -4555,7 +4546,7 @@
         <p:spPr>
           <a:xfrm>
             <a:off x="0" y="914400"/>
-            <a:ext cx="9142920" cy="53640"/>
+            <a:ext cx="9142560" cy="53280"/>
           </a:xfrm>
           <a:prstGeom prst="rect">
             <a:avLst/>
@@ -4604,7 +4595,7 @@
         <p:spPr>
           <a:xfrm>
             <a:off x="411480" y="0"/>
-            <a:ext cx="8319960" cy="913320"/>
+            <a:ext cx="8319600" cy="912960"/>
           </a:xfrm>
           <a:prstGeom prst="rect">
             <a:avLst/>
@@ -4703,7 +4694,7 @@
         <p:spPr>
           <a:xfrm>
             <a:off x="384120" y="1078920"/>
-            <a:ext cx="510840" cy="510840"/>
+            <a:ext cx="510480" cy="510480"/>
           </a:xfrm>
           <a:prstGeom prst="ellipse">
             <a:avLst/>
@@ -4752,7 +4743,7 @@
         <p:spPr>
           <a:xfrm>
             <a:off x="384120" y="1078920"/>
-            <a:ext cx="510840" cy="510840"/>
+            <a:ext cx="510480" cy="510480"/>
           </a:xfrm>
           <a:prstGeom prst="rect">
             <a:avLst/>
@@ -4808,7 +4799,7 @@
         <p:spPr>
           <a:xfrm>
             <a:off x="1051560" y="1078920"/>
-            <a:ext cx="7725600" cy="684720"/>
+            <a:ext cx="7725240" cy="684360"/>
           </a:xfrm>
           <a:prstGeom prst="rect">
             <a:avLst/>
@@ -4857,7 +4848,7 @@
         <p:spPr>
           <a:xfrm>
             <a:off x="1188720" y="1115640"/>
-            <a:ext cx="2376360" cy="318960"/>
+            <a:ext cx="2376000" cy="318600"/>
           </a:xfrm>
           <a:prstGeom prst="rect">
             <a:avLst/>
@@ -4914,7 +4905,7 @@
         <p:spPr>
           <a:xfrm>
             <a:off x="1188720" y="1408320"/>
-            <a:ext cx="7405560" cy="300600"/>
+            <a:ext cx="7405200" cy="300240"/>
           </a:xfrm>
           <a:prstGeom prst="rect">
             <a:avLst/>
@@ -5013,7 +5004,7 @@
         <p:spPr>
           <a:xfrm>
             <a:off x="384120" y="1874520"/>
-            <a:ext cx="510840" cy="510840"/>
+            <a:ext cx="510480" cy="510480"/>
           </a:xfrm>
           <a:prstGeom prst="ellipse">
             <a:avLst/>
@@ -5062,7 +5053,7 @@
         <p:spPr>
           <a:xfrm>
             <a:off x="384120" y="1874520"/>
-            <a:ext cx="510840" cy="510840"/>
+            <a:ext cx="510480" cy="510480"/>
           </a:xfrm>
           <a:prstGeom prst="rect">
             <a:avLst/>
@@ -5118,7 +5109,7 @@
         <p:spPr>
           <a:xfrm>
             <a:off x="1051560" y="1874520"/>
-            <a:ext cx="7725600" cy="684720"/>
+            <a:ext cx="7725240" cy="684360"/>
           </a:xfrm>
           <a:prstGeom prst="rect">
             <a:avLst/>
@@ -5167,7 +5158,7 @@
         <p:spPr>
           <a:xfrm>
             <a:off x="1188720" y="1911240"/>
-            <a:ext cx="2376360" cy="318960"/>
+            <a:ext cx="2376000" cy="318600"/>
           </a:xfrm>
           <a:prstGeom prst="rect">
             <a:avLst/>
@@ -5224,7 +5215,7 @@
         <p:spPr>
           <a:xfrm>
             <a:off x="1188720" y="2203560"/>
-            <a:ext cx="7405560" cy="300600"/>
+            <a:ext cx="7405200" cy="300240"/>
           </a:xfrm>
           <a:prstGeom prst="rect">
             <a:avLst/>
@@ -5323,7 +5314,7 @@
         <p:spPr>
           <a:xfrm>
             <a:off x="384120" y="2670120"/>
-            <a:ext cx="510840" cy="510840"/>
+            <a:ext cx="510480" cy="510480"/>
           </a:xfrm>
           <a:prstGeom prst="ellipse">
             <a:avLst/>
@@ -5372,7 +5363,7 @@
         <p:spPr>
           <a:xfrm>
             <a:off x="384120" y="2670120"/>
-            <a:ext cx="510840" cy="510840"/>
+            <a:ext cx="510480" cy="510480"/>
           </a:xfrm>
           <a:prstGeom prst="rect">
             <a:avLst/>
@@ -5428,7 +5419,7 @@
         <p:spPr>
           <a:xfrm>
             <a:off x="1051560" y="2670120"/>
-            <a:ext cx="7725600" cy="684720"/>
+            <a:ext cx="7725240" cy="684360"/>
           </a:xfrm>
           <a:prstGeom prst="rect">
             <a:avLst/>
@@ -5477,7 +5468,7 @@
         <p:spPr>
           <a:xfrm>
             <a:off x="1188720" y="2706480"/>
-            <a:ext cx="2376360" cy="318960"/>
+            <a:ext cx="2376000" cy="318600"/>
           </a:xfrm>
           <a:prstGeom prst="rect">
             <a:avLst/>
@@ -5534,7 +5525,7 @@
         <p:spPr>
           <a:xfrm>
             <a:off x="1188720" y="2999160"/>
-            <a:ext cx="7405560" cy="300600"/>
+            <a:ext cx="7405200" cy="300240"/>
           </a:xfrm>
           <a:prstGeom prst="rect">
             <a:avLst/>
@@ -5633,7 +5624,7 @@
         <p:spPr>
           <a:xfrm>
             <a:off x="384120" y="3465720"/>
-            <a:ext cx="510840" cy="510840"/>
+            <a:ext cx="510480" cy="510480"/>
           </a:xfrm>
           <a:prstGeom prst="ellipse">
             <a:avLst/>
@@ -5682,7 +5673,7 @@
         <p:spPr>
           <a:xfrm>
             <a:off x="384120" y="3465720"/>
-            <a:ext cx="510840" cy="510840"/>
+            <a:ext cx="510480" cy="510480"/>
           </a:xfrm>
           <a:prstGeom prst="rect">
             <a:avLst/>
@@ -5738,7 +5729,7 @@
         <p:spPr>
           <a:xfrm>
             <a:off x="1051560" y="3465720"/>
-            <a:ext cx="7725600" cy="684720"/>
+            <a:ext cx="7725240" cy="684360"/>
           </a:xfrm>
           <a:prstGeom prst="rect">
             <a:avLst/>
@@ -5787,7 +5778,7 @@
         <p:spPr>
           <a:xfrm>
             <a:off x="1188720" y="3502080"/>
-            <a:ext cx="2376360" cy="318960"/>
+            <a:ext cx="2376000" cy="318600"/>
           </a:xfrm>
           <a:prstGeom prst="rect">
             <a:avLst/>
@@ -5844,7 +5835,7 @@
         <p:spPr>
           <a:xfrm>
             <a:off x="1188720" y="3794760"/>
-            <a:ext cx="7405560" cy="300600"/>
+            <a:ext cx="7405200" cy="300240"/>
           </a:xfrm>
           <a:prstGeom prst="rect">
             <a:avLst/>
@@ -5901,7 +5892,7 @@
         <p:spPr>
           <a:xfrm>
             <a:off x="384120" y="4260960"/>
-            <a:ext cx="510840" cy="510840"/>
+            <a:ext cx="510480" cy="510480"/>
           </a:xfrm>
           <a:prstGeom prst="ellipse">
             <a:avLst/>
@@ -5950,7 +5941,7 @@
         <p:spPr>
           <a:xfrm>
             <a:off x="384120" y="4260960"/>
-            <a:ext cx="510840" cy="510840"/>
+            <a:ext cx="510480" cy="510480"/>
           </a:xfrm>
           <a:prstGeom prst="rect">
             <a:avLst/>
@@ -6006,7 +5997,7 @@
         <p:spPr>
           <a:xfrm>
             <a:off x="1051560" y="4260960"/>
-            <a:ext cx="7725600" cy="684720"/>
+            <a:ext cx="7725240" cy="684360"/>
           </a:xfrm>
           <a:prstGeom prst="rect">
             <a:avLst/>
@@ -6055,7 +6046,7 @@
         <p:spPr>
           <a:xfrm>
             <a:off x="1188720" y="4297680"/>
-            <a:ext cx="2376360" cy="318960"/>
+            <a:ext cx="2376000" cy="318600"/>
           </a:xfrm>
           <a:prstGeom prst="rect">
             <a:avLst/>
@@ -6112,7 +6103,7 @@
         <p:spPr>
           <a:xfrm>
             <a:off x="1188720" y="4590360"/>
-            <a:ext cx="7405560" cy="300600"/>
+            <a:ext cx="7405200" cy="300240"/>
           </a:xfrm>
           <a:prstGeom prst="rect">
             <a:avLst/>
@@ -6206,7 +6197,7 @@
         <p:spPr>
           <a:xfrm>
             <a:off x="0" y="0"/>
-            <a:ext cx="9142920" cy="959040"/>
+            <a:ext cx="9142560" cy="958680"/>
           </a:xfrm>
           <a:prstGeom prst="rect">
             <a:avLst/>
@@ -6255,7 +6246,7 @@
         <p:spPr>
           <a:xfrm>
             <a:off x="0" y="960120"/>
-            <a:ext cx="9142920" cy="63000"/>
+            <a:ext cx="9142560" cy="62640"/>
           </a:xfrm>
           <a:prstGeom prst="rect">
             <a:avLst/>
@@ -6304,7 +6295,7 @@
         <p:spPr>
           <a:xfrm>
             <a:off x="411480" y="0"/>
-            <a:ext cx="8319960" cy="959040"/>
+            <a:ext cx="8319600" cy="958680"/>
           </a:xfrm>
           <a:prstGeom prst="rect">
             <a:avLst/>
@@ -6361,7 +6352,7 @@
         <p:spPr>
           <a:xfrm>
             <a:off x="292680" y="1143000"/>
-            <a:ext cx="2010600" cy="1663200"/>
+            <a:ext cx="2010240" cy="1662840"/>
           </a:xfrm>
           <a:prstGeom prst="rect">
             <a:avLst/>
@@ -6417,7 +6408,7 @@
         <p:spPr>
           <a:xfrm>
             <a:off x="292680" y="1234440"/>
-            <a:ext cx="2010600" cy="456120"/>
+            <a:ext cx="2010240" cy="455760"/>
           </a:xfrm>
           <a:prstGeom prst="rect">
             <a:avLst/>
@@ -6473,7 +6464,7 @@
         <p:spPr>
           <a:xfrm>
             <a:off x="384120" y="1691640"/>
-            <a:ext cx="1827720" cy="383040"/>
+            <a:ext cx="1827360" cy="382680"/>
           </a:xfrm>
           <a:prstGeom prst="rect">
             <a:avLst/>
@@ -6530,7 +6521,7 @@
         <p:spPr>
           <a:xfrm>
             <a:off x="384120" y="2057400"/>
-            <a:ext cx="1827720" cy="684720"/>
+            <a:ext cx="1827360" cy="684360"/>
           </a:xfrm>
           <a:prstGeom prst="rect">
             <a:avLst/>
@@ -6587,7 +6578,7 @@
         <p:spPr>
           <a:xfrm>
             <a:off x="2459880" y="1143000"/>
-            <a:ext cx="2010600" cy="1663200"/>
+            <a:ext cx="2010240" cy="1662840"/>
           </a:xfrm>
           <a:prstGeom prst="rect">
             <a:avLst/>
@@ -6643,7 +6634,7 @@
         <p:spPr>
           <a:xfrm>
             <a:off x="2459880" y="1234440"/>
-            <a:ext cx="2010600" cy="456120"/>
+            <a:ext cx="2010240" cy="455760"/>
           </a:xfrm>
           <a:prstGeom prst="rect">
             <a:avLst/>
@@ -6699,7 +6690,7 @@
         <p:spPr>
           <a:xfrm>
             <a:off x="2551320" y="1691640"/>
-            <a:ext cx="1827720" cy="383040"/>
+            <a:ext cx="1827360" cy="382680"/>
           </a:xfrm>
           <a:prstGeom prst="rect">
             <a:avLst/>
@@ -6756,7 +6747,7 @@
         <p:spPr>
           <a:xfrm>
             <a:off x="2551320" y="2057400"/>
-            <a:ext cx="1827720" cy="684720"/>
+            <a:ext cx="1827360" cy="684360"/>
           </a:xfrm>
           <a:prstGeom prst="rect">
             <a:avLst/>
@@ -6813,7 +6804,7 @@
         <p:spPr>
           <a:xfrm>
             <a:off x="4626720" y="1143000"/>
-            <a:ext cx="2010600" cy="1663200"/>
+            <a:ext cx="2010240" cy="1662840"/>
           </a:xfrm>
           <a:prstGeom prst="rect">
             <a:avLst/>
@@ -6869,7 +6860,7 @@
         <p:spPr>
           <a:xfrm>
             <a:off x="4626720" y="1234440"/>
-            <a:ext cx="2010600" cy="456120"/>
+            <a:ext cx="2010240" cy="455760"/>
           </a:xfrm>
           <a:prstGeom prst="rect">
             <a:avLst/>
@@ -6925,7 +6916,7 @@
         <p:spPr>
           <a:xfrm>
             <a:off x="4718160" y="1691640"/>
-            <a:ext cx="1827720" cy="383040"/>
+            <a:ext cx="1827360" cy="382680"/>
           </a:xfrm>
           <a:prstGeom prst="rect">
             <a:avLst/>
@@ -6982,7 +6973,7 @@
         <p:spPr>
           <a:xfrm>
             <a:off x="4718160" y="2057400"/>
-            <a:ext cx="1827720" cy="684720"/>
+            <a:ext cx="1827360" cy="684360"/>
           </a:xfrm>
           <a:prstGeom prst="rect">
             <a:avLst/>
@@ -7039,7 +7030,7 @@
         <p:spPr>
           <a:xfrm>
             <a:off x="6793920" y="1143000"/>
-            <a:ext cx="2010600" cy="1663200"/>
+            <a:ext cx="2010240" cy="1662840"/>
           </a:xfrm>
           <a:prstGeom prst="rect">
             <a:avLst/>
@@ -7095,7 +7086,7 @@
         <p:spPr>
           <a:xfrm>
             <a:off x="6793920" y="1234440"/>
-            <a:ext cx="2010600" cy="456120"/>
+            <a:ext cx="2010240" cy="455760"/>
           </a:xfrm>
           <a:prstGeom prst="rect">
             <a:avLst/>
@@ -7151,7 +7142,7 @@
         <p:spPr>
           <a:xfrm>
             <a:off x="6885360" y="1691640"/>
-            <a:ext cx="1827720" cy="383040"/>
+            <a:ext cx="1827360" cy="382680"/>
           </a:xfrm>
           <a:prstGeom prst="rect">
             <a:avLst/>
@@ -7208,7 +7199,7 @@
         <p:spPr>
           <a:xfrm>
             <a:off x="6885360" y="2057400"/>
-            <a:ext cx="1827720" cy="684720"/>
+            <a:ext cx="1827360" cy="684360"/>
           </a:xfrm>
           <a:prstGeom prst="rect">
             <a:avLst/>
@@ -7265,7 +7256,7 @@
         <p:spPr>
           <a:xfrm>
             <a:off x="292680" y="2953440"/>
-            <a:ext cx="2010600" cy="1663200"/>
+            <a:ext cx="2010240" cy="1662840"/>
           </a:xfrm>
           <a:prstGeom prst="rect">
             <a:avLst/>
@@ -7321,7 +7312,7 @@
         <p:spPr>
           <a:xfrm>
             <a:off x="292680" y="3044880"/>
-            <a:ext cx="2010600" cy="456120"/>
+            <a:ext cx="2010240" cy="455760"/>
           </a:xfrm>
           <a:prstGeom prst="rect">
             <a:avLst/>
@@ -7377,7 +7368,7 @@
         <p:spPr>
           <a:xfrm>
             <a:off x="384120" y="3502080"/>
-            <a:ext cx="1827720" cy="383040"/>
+            <a:ext cx="1827360" cy="382680"/>
           </a:xfrm>
           <a:prstGeom prst="rect">
             <a:avLst/>
@@ -7434,7 +7425,7 @@
         <p:spPr>
           <a:xfrm>
             <a:off x="384120" y="3867840"/>
-            <a:ext cx="1827720" cy="684720"/>
+            <a:ext cx="1827360" cy="684360"/>
           </a:xfrm>
           <a:prstGeom prst="rect">
             <a:avLst/>
@@ -7491,7 +7482,7 @@
         <p:spPr>
           <a:xfrm>
             <a:off x="2459880" y="2953440"/>
-            <a:ext cx="2010600" cy="1663200"/>
+            <a:ext cx="2010240" cy="1662840"/>
           </a:xfrm>
           <a:prstGeom prst="rect">
             <a:avLst/>
@@ -7547,7 +7538,7 @@
         <p:spPr>
           <a:xfrm>
             <a:off x="2459880" y="3044880"/>
-            <a:ext cx="2010600" cy="456120"/>
+            <a:ext cx="2010240" cy="455760"/>
           </a:xfrm>
           <a:prstGeom prst="rect">
             <a:avLst/>
@@ -7603,7 +7594,7 @@
         <p:spPr>
           <a:xfrm>
             <a:off x="2551320" y="3502080"/>
-            <a:ext cx="1827720" cy="383040"/>
+            <a:ext cx="1827360" cy="382680"/>
           </a:xfrm>
           <a:prstGeom prst="rect">
             <a:avLst/>
@@ -7660,7 +7651,7 @@
         <p:spPr>
           <a:xfrm>
             <a:off x="2551320" y="3867840"/>
-            <a:ext cx="1827720" cy="684720"/>
+            <a:ext cx="1827360" cy="684360"/>
           </a:xfrm>
           <a:prstGeom prst="rect">
             <a:avLst/>
@@ -7717,7 +7708,7 @@
         <p:spPr>
           <a:xfrm>
             <a:off x="4626720" y="2953440"/>
-            <a:ext cx="2010600" cy="1663200"/>
+            <a:ext cx="2010240" cy="1662840"/>
           </a:xfrm>
           <a:prstGeom prst="rect">
             <a:avLst/>
@@ -7773,7 +7764,7 @@
         <p:spPr>
           <a:xfrm>
             <a:off x="4626720" y="3044880"/>
-            <a:ext cx="2010600" cy="456120"/>
+            <a:ext cx="2010240" cy="455760"/>
           </a:xfrm>
           <a:prstGeom prst="rect">
             <a:avLst/>
@@ -7829,7 +7820,7 @@
         <p:spPr>
           <a:xfrm>
             <a:off x="4718160" y="3502080"/>
-            <a:ext cx="1827720" cy="383040"/>
+            <a:ext cx="1827360" cy="382680"/>
           </a:xfrm>
           <a:prstGeom prst="rect">
             <a:avLst/>
@@ -7886,7 +7877,7 @@
         <p:spPr>
           <a:xfrm>
             <a:off x="4718160" y="3867840"/>
-            <a:ext cx="1827720" cy="684720"/>
+            <a:ext cx="1827360" cy="684360"/>
           </a:xfrm>
           <a:prstGeom prst="rect">
             <a:avLst/>
@@ -7980,7 +7971,7 @@
         <p:spPr>
           <a:xfrm>
             <a:off x="0" y="0"/>
-            <a:ext cx="9142920" cy="913320"/>
+            <a:ext cx="9142560" cy="912960"/>
           </a:xfrm>
           <a:prstGeom prst="rect">
             <a:avLst/>
@@ -8029,7 +8020,7 @@
         <p:spPr>
           <a:xfrm>
             <a:off x="411480" y="0"/>
-            <a:ext cx="8319960" cy="913320"/>
+            <a:ext cx="8319600" cy="912960"/>
           </a:xfrm>
           <a:prstGeom prst="rect">
             <a:avLst/>
@@ -8086,7 +8077,7 @@
         <p:spPr>
           <a:xfrm>
             <a:off x="320040" y="1051560"/>
-            <a:ext cx="4205160" cy="1169280"/>
+            <a:ext cx="4204800" cy="1168920"/>
           </a:xfrm>
           <a:prstGeom prst="rect">
             <a:avLst/>
@@ -8142,7 +8133,7 @@
         <p:spPr>
           <a:xfrm>
             <a:off x="320040" y="1051560"/>
-            <a:ext cx="108720" cy="1169280"/>
+            <a:ext cx="108360" cy="1168920"/>
           </a:xfrm>
           <a:prstGeom prst="rect">
             <a:avLst/>
@@ -8191,7 +8182,7 @@
         <p:spPr>
           <a:xfrm>
             <a:off x="521280" y="1143000"/>
-            <a:ext cx="547560" cy="547560"/>
+            <a:ext cx="547200" cy="547200"/>
           </a:xfrm>
           <a:prstGeom prst="rect">
             <a:avLst/>
@@ -8247,7 +8238,7 @@
         <p:spPr>
           <a:xfrm>
             <a:off x="1124640" y="1115640"/>
-            <a:ext cx="3245040" cy="346320"/>
+            <a:ext cx="3244680" cy="345960"/>
           </a:xfrm>
           <a:prstGeom prst="rect">
             <a:avLst/>
@@ -8304,7 +8295,7 @@
         <p:spPr>
           <a:xfrm>
             <a:off x="1124640" y="1454040"/>
-            <a:ext cx="3245040" cy="712080"/>
+            <a:ext cx="3244680" cy="711720"/>
           </a:xfrm>
           <a:prstGeom prst="rect">
             <a:avLst/>
@@ -8361,7 +8352,7 @@
         <p:spPr>
           <a:xfrm>
             <a:off x="4800600" y="1051560"/>
-            <a:ext cx="4205160" cy="1169280"/>
+            <a:ext cx="4204800" cy="1168920"/>
           </a:xfrm>
           <a:prstGeom prst="rect">
             <a:avLst/>
@@ -8417,7 +8408,7 @@
         <p:spPr>
           <a:xfrm>
             <a:off x="4800600" y="1051560"/>
-            <a:ext cx="108720" cy="1169280"/>
+            <a:ext cx="108360" cy="1168920"/>
           </a:xfrm>
           <a:prstGeom prst="rect">
             <a:avLst/>
@@ -8466,7 +8457,7 @@
         <p:spPr>
           <a:xfrm>
             <a:off x="5001840" y="1143000"/>
-            <a:ext cx="547560" cy="547560"/>
+            <a:ext cx="547200" cy="547200"/>
           </a:xfrm>
           <a:prstGeom prst="rect">
             <a:avLst/>
@@ -8522,7 +8513,7 @@
         <p:spPr>
           <a:xfrm>
             <a:off x="5605200" y="1115640"/>
-            <a:ext cx="3245040" cy="346320"/>
+            <a:ext cx="3244680" cy="345960"/>
           </a:xfrm>
           <a:prstGeom prst="rect">
             <a:avLst/>
@@ -8579,7 +8570,7 @@
         <p:spPr>
           <a:xfrm>
             <a:off x="5605200" y="1454040"/>
-            <a:ext cx="3245040" cy="712080"/>
+            <a:ext cx="3244680" cy="711720"/>
           </a:xfrm>
           <a:prstGeom prst="rect">
             <a:avLst/>
@@ -8636,7 +8627,7 @@
         <p:spPr>
           <a:xfrm>
             <a:off x="320040" y="2368440"/>
-            <a:ext cx="4205160" cy="1169280"/>
+            <a:ext cx="4204800" cy="1168920"/>
           </a:xfrm>
           <a:prstGeom prst="rect">
             <a:avLst/>
@@ -8692,7 +8683,7 @@
         <p:spPr>
           <a:xfrm>
             <a:off x="320040" y="2368440"/>
-            <a:ext cx="108720" cy="1169280"/>
+            <a:ext cx="108360" cy="1168920"/>
           </a:xfrm>
           <a:prstGeom prst="rect">
             <a:avLst/>
@@ -8741,7 +8732,7 @@
         <p:spPr>
           <a:xfrm>
             <a:off x="521280" y="2459880"/>
-            <a:ext cx="547560" cy="547560"/>
+            <a:ext cx="547200" cy="547200"/>
           </a:xfrm>
           <a:prstGeom prst="rect">
             <a:avLst/>
@@ -8797,7 +8788,7 @@
         <p:spPr>
           <a:xfrm>
             <a:off x="1124640" y="2432160"/>
-            <a:ext cx="3245040" cy="346320"/>
+            <a:ext cx="3244680" cy="345960"/>
           </a:xfrm>
           <a:prstGeom prst="rect">
             <a:avLst/>
@@ -8854,7 +8845,7 @@
         <p:spPr>
           <a:xfrm>
             <a:off x="1124640" y="2770560"/>
-            <a:ext cx="3245040" cy="712080"/>
+            <a:ext cx="3244680" cy="711720"/>
           </a:xfrm>
           <a:prstGeom prst="rect">
             <a:avLst/>
@@ -8911,7 +8902,7 @@
         <p:spPr>
           <a:xfrm>
             <a:off x="4800600" y="2368440"/>
-            <a:ext cx="4205160" cy="1169280"/>
+            <a:ext cx="4204800" cy="1168920"/>
           </a:xfrm>
           <a:prstGeom prst="rect">
             <a:avLst/>
@@ -8967,7 +8958,7 @@
         <p:spPr>
           <a:xfrm>
             <a:off x="4800600" y="2368440"/>
-            <a:ext cx="108720" cy="1169280"/>
+            <a:ext cx="108360" cy="1168920"/>
           </a:xfrm>
           <a:prstGeom prst="rect">
             <a:avLst/>
@@ -9016,7 +9007,7 @@
         <p:spPr>
           <a:xfrm>
             <a:off x="5001840" y="2459880"/>
-            <a:ext cx="547560" cy="547560"/>
+            <a:ext cx="547200" cy="547200"/>
           </a:xfrm>
           <a:prstGeom prst="rect">
             <a:avLst/>
@@ -9072,7 +9063,7 @@
         <p:spPr>
           <a:xfrm>
             <a:off x="5605200" y="2432160"/>
-            <a:ext cx="3245040" cy="346320"/>
+            <a:ext cx="3244680" cy="345960"/>
           </a:xfrm>
           <a:prstGeom prst="rect">
             <a:avLst/>
@@ -9129,7 +9120,7 @@
         <p:spPr>
           <a:xfrm>
             <a:off x="5605200" y="2770560"/>
-            <a:ext cx="3245040" cy="712080"/>
+            <a:ext cx="3244680" cy="711720"/>
           </a:xfrm>
           <a:prstGeom prst="rect">
             <a:avLst/>
@@ -9186,7 +9177,7 @@
         <p:spPr>
           <a:xfrm>
             <a:off x="320040" y="3684960"/>
-            <a:ext cx="4205160" cy="1169280"/>
+            <a:ext cx="4204800" cy="1168920"/>
           </a:xfrm>
           <a:prstGeom prst="rect">
             <a:avLst/>
@@ -9242,7 +9233,7 @@
         <p:spPr>
           <a:xfrm>
             <a:off x="320040" y="3684960"/>
-            <a:ext cx="108720" cy="1169280"/>
+            <a:ext cx="108360" cy="1168920"/>
           </a:xfrm>
           <a:prstGeom prst="rect">
             <a:avLst/>
@@ -9291,7 +9282,7 @@
         <p:spPr>
           <a:xfrm>
             <a:off x="521280" y="3776400"/>
-            <a:ext cx="547560" cy="547560"/>
+            <a:ext cx="547200" cy="547200"/>
           </a:xfrm>
           <a:prstGeom prst="rect">
             <a:avLst/>
@@ -9347,7 +9338,7 @@
         <p:spPr>
           <a:xfrm>
             <a:off x="1124640" y="3749040"/>
-            <a:ext cx="3245040" cy="346320"/>
+            <a:ext cx="3244680" cy="345960"/>
           </a:xfrm>
           <a:prstGeom prst="rect">
             <a:avLst/>
@@ -9404,7 +9395,7 @@
         <p:spPr>
           <a:xfrm>
             <a:off x="1124640" y="4087440"/>
-            <a:ext cx="3245040" cy="712080"/>
+            <a:ext cx="3244680" cy="711720"/>
           </a:xfrm>
           <a:prstGeom prst="rect">
             <a:avLst/>
@@ -9461,7 +9452,7 @@
         <p:spPr>
           <a:xfrm>
             <a:off x="4800600" y="3684960"/>
-            <a:ext cx="4205160" cy="1169280"/>
+            <a:ext cx="4204800" cy="1168920"/>
           </a:xfrm>
           <a:prstGeom prst="rect">
             <a:avLst/>
@@ -9517,7 +9508,7 @@
         <p:spPr>
           <a:xfrm>
             <a:off x="4800600" y="3684960"/>
-            <a:ext cx="108720" cy="1169280"/>
+            <a:ext cx="108360" cy="1168920"/>
           </a:xfrm>
           <a:prstGeom prst="rect">
             <a:avLst/>
@@ -9566,7 +9557,7 @@
         <p:spPr>
           <a:xfrm>
             <a:off x="5001840" y="3776400"/>
-            <a:ext cx="547560" cy="547560"/>
+            <a:ext cx="547200" cy="547200"/>
           </a:xfrm>
           <a:prstGeom prst="rect">
             <a:avLst/>
@@ -9622,7 +9613,7 @@
         <p:spPr>
           <a:xfrm>
             <a:off x="5605200" y="3749040"/>
-            <a:ext cx="3245040" cy="346320"/>
+            <a:ext cx="3244680" cy="345960"/>
           </a:xfrm>
           <a:prstGeom prst="rect">
             <a:avLst/>
@@ -9679,7 +9670,7 @@
         <p:spPr>
           <a:xfrm>
             <a:off x="5605200" y="4087440"/>
-            <a:ext cx="3245040" cy="712080"/>
+            <a:ext cx="3244680" cy="711720"/>
           </a:xfrm>
           <a:prstGeom prst="rect">
             <a:avLst/>
@@ -9773,7 +9764,7 @@
         <p:spPr>
           <a:xfrm>
             <a:off x="0" y="0"/>
-            <a:ext cx="9142920" cy="959040"/>
+            <a:ext cx="9142560" cy="958680"/>
           </a:xfrm>
           <a:prstGeom prst="rect">
             <a:avLst/>
@@ -9822,7 +9813,7 @@
         <p:spPr>
           <a:xfrm>
             <a:off x="0" y="960120"/>
-            <a:ext cx="9142920" cy="63000"/>
+            <a:ext cx="9142560" cy="62640"/>
           </a:xfrm>
           <a:prstGeom prst="rect">
             <a:avLst/>
@@ -9871,7 +9862,7 @@
         <p:spPr>
           <a:xfrm>
             <a:off x="411480" y="0"/>
-            <a:ext cx="8319960" cy="959040"/>
+            <a:ext cx="8319600" cy="958680"/>
           </a:xfrm>
           <a:prstGeom prst="rect">
             <a:avLst/>
@@ -9928,7 +9919,7 @@
         <p:spPr>
           <a:xfrm>
             <a:off x="365760" y="1188720"/>
-            <a:ext cx="4113720" cy="3610800"/>
+            <a:ext cx="4113360" cy="3610440"/>
           </a:xfrm>
           <a:prstGeom prst="rect">
             <a:avLst/>
@@ -9984,7 +9975,7 @@
         <p:spPr>
           <a:xfrm>
             <a:off x="365760" y="1188720"/>
-            <a:ext cx="4113720" cy="456120"/>
+            <a:ext cx="4113360" cy="455760"/>
           </a:xfrm>
           <a:prstGeom prst="rect">
             <a:avLst/>
@@ -10033,7 +10024,7 @@
         <p:spPr>
           <a:xfrm>
             <a:off x="502920" y="1188720"/>
-            <a:ext cx="3839400" cy="456120"/>
+            <a:ext cx="3839040" cy="455760"/>
           </a:xfrm>
           <a:prstGeom prst="rect">
             <a:avLst/>
@@ -10090,7 +10081,7 @@
         <p:spPr>
           <a:xfrm>
             <a:off x="502920" y="1737360"/>
-            <a:ext cx="3839400" cy="2925000"/>
+            <a:ext cx="3839040" cy="2924640"/>
           </a:xfrm>
           <a:prstGeom prst="rect">
             <a:avLst/>
@@ -10231,7 +10222,7 @@
         <p:spPr>
           <a:xfrm>
             <a:off x="4754880" y="1188720"/>
-            <a:ext cx="4068000" cy="1663200"/>
+            <a:ext cx="4067640" cy="1662840"/>
           </a:xfrm>
           <a:prstGeom prst="rect">
             <a:avLst/>
@@ -10287,7 +10278,7 @@
         <p:spPr>
           <a:xfrm>
             <a:off x="4754880" y="1188720"/>
-            <a:ext cx="4068000" cy="437760"/>
+            <a:ext cx="4067640" cy="437400"/>
           </a:xfrm>
           <a:prstGeom prst="rect">
             <a:avLst/>
@@ -10336,7 +10327,7 @@
         <p:spPr>
           <a:xfrm>
             <a:off x="4864680" y="1188720"/>
-            <a:ext cx="3839400" cy="437760"/>
+            <a:ext cx="3839040" cy="437400"/>
           </a:xfrm>
           <a:prstGeom prst="rect">
             <a:avLst/>
@@ -10403,7 +10394,7 @@
         <p:spPr>
           <a:xfrm>
             <a:off x="4892040" y="1682640"/>
-            <a:ext cx="3793680" cy="273240"/>
+            <a:ext cx="3793320" cy="272880"/>
           </a:xfrm>
           <a:prstGeom prst="rect">
             <a:avLst/>
@@ -10470,7 +10461,7 @@
         <p:spPr>
           <a:xfrm>
             <a:off x="4892040" y="1956960"/>
-            <a:ext cx="3793680" cy="273240"/>
+            <a:ext cx="3793320" cy="272880"/>
           </a:xfrm>
           <a:prstGeom prst="rect">
             <a:avLst/>
@@ -10537,7 +10528,7 @@
         <p:spPr>
           <a:xfrm>
             <a:off x="4892040" y="2231280"/>
-            <a:ext cx="3793680" cy="273240"/>
+            <a:ext cx="3793320" cy="272880"/>
           </a:xfrm>
           <a:prstGeom prst="rect">
             <a:avLst/>
@@ -10604,7 +10595,7 @@
         <p:spPr>
           <a:xfrm>
             <a:off x="4892040" y="2505600"/>
-            <a:ext cx="3793680" cy="273240"/>
+            <a:ext cx="3793320" cy="272880"/>
           </a:xfrm>
           <a:prstGeom prst="rect">
             <a:avLst/>
@@ -10671,7 +10662,7 @@
         <p:spPr>
           <a:xfrm>
             <a:off x="4754880" y="3035880"/>
-            <a:ext cx="4068000" cy="1663200"/>
+            <a:ext cx="4067640" cy="1662840"/>
           </a:xfrm>
           <a:prstGeom prst="rect">
             <a:avLst/>
@@ -10727,7 +10718,7 @@
         <p:spPr>
           <a:xfrm>
             <a:off x="4754880" y="3035880"/>
-            <a:ext cx="4068000" cy="437760"/>
+            <a:ext cx="4067640" cy="437400"/>
           </a:xfrm>
           <a:prstGeom prst="rect">
             <a:avLst/>
@@ -10776,7 +10767,7 @@
         <p:spPr>
           <a:xfrm>
             <a:off x="4864680" y="3035880"/>
-            <a:ext cx="3839400" cy="437760"/>
+            <a:ext cx="3839040" cy="437400"/>
           </a:xfrm>
           <a:prstGeom prst="rect">
             <a:avLst/>
@@ -10843,7 +10834,7 @@
         <p:spPr>
           <a:xfrm>
             <a:off x="4892040" y="3529440"/>
-            <a:ext cx="3793680" cy="273240"/>
+            <a:ext cx="3793320" cy="272880"/>
           </a:xfrm>
           <a:prstGeom prst="rect">
             <a:avLst/>
@@ -10910,7 +10901,7 @@
         <p:spPr>
           <a:xfrm>
             <a:off x="4892040" y="3803760"/>
-            <a:ext cx="3793680" cy="273240"/>
+            <a:ext cx="3793320" cy="272880"/>
           </a:xfrm>
           <a:prstGeom prst="rect">
             <a:avLst/>
@@ -10977,7 +10968,7 @@
         <p:spPr>
           <a:xfrm>
             <a:off x="4892040" y="4078080"/>
-            <a:ext cx="3793680" cy="273240"/>
+            <a:ext cx="3793320" cy="272880"/>
           </a:xfrm>
           <a:prstGeom prst="rect">
             <a:avLst/>
@@ -11044,7 +11035,7 @@
         <p:spPr>
           <a:xfrm>
             <a:off x="4892040" y="4352400"/>
-            <a:ext cx="3793680" cy="273240"/>
+            <a:ext cx="3793320" cy="272880"/>
           </a:xfrm>
           <a:prstGeom prst="rect">
             <a:avLst/>
@@ -11148,7 +11139,7 @@
         <p:spPr>
           <a:xfrm>
             <a:off x="0" y="0"/>
-            <a:ext cx="9142920" cy="913320"/>
+            <a:ext cx="9142560" cy="912960"/>
           </a:xfrm>
           <a:prstGeom prst="rect">
             <a:avLst/>
@@ -11197,7 +11188,7 @@
         <p:spPr>
           <a:xfrm>
             <a:off x="0" y="914400"/>
-            <a:ext cx="9142920" cy="53640"/>
+            <a:ext cx="9142560" cy="53280"/>
           </a:xfrm>
           <a:prstGeom prst="rect">
             <a:avLst/>
@@ -11246,7 +11237,7 @@
         <p:spPr>
           <a:xfrm>
             <a:off x="411480" y="0"/>
-            <a:ext cx="8319960" cy="913320"/>
+            <a:ext cx="8319600" cy="912960"/>
           </a:xfrm>
           <a:prstGeom prst="rect">
             <a:avLst/>
@@ -11303,7 +11294,7 @@
         <p:spPr>
           <a:xfrm>
             <a:off x="320040" y="1051560"/>
-            <a:ext cx="4113720" cy="456120"/>
+            <a:ext cx="4113360" cy="455760"/>
           </a:xfrm>
           <a:prstGeom prst="rect">
             <a:avLst/>
@@ -11352,7 +11343,7 @@
         <p:spPr>
           <a:xfrm>
             <a:off x="320040" y="1051560"/>
-            <a:ext cx="4113720" cy="456120"/>
+            <a:ext cx="4113360" cy="455760"/>
           </a:xfrm>
           <a:prstGeom prst="rect">
             <a:avLst/>
@@ -11419,7 +11410,7 @@
         <p:spPr>
           <a:xfrm>
             <a:off x="320040" y="1645920"/>
-            <a:ext cx="4113720" cy="593280"/>
+            <a:ext cx="4113360" cy="592920"/>
           </a:xfrm>
           <a:prstGeom prst="rect">
             <a:avLst/>
@@ -11468,7 +11459,7 @@
         <p:spPr>
           <a:xfrm>
             <a:off x="457200" y="1682640"/>
-            <a:ext cx="3793680" cy="529200"/>
+            <a:ext cx="3793320" cy="528840"/>
           </a:xfrm>
           <a:prstGeom prst="rect">
             <a:avLst/>
@@ -11564,7 +11555,7 @@
         <p:spPr>
           <a:xfrm>
             <a:off x="320040" y="2313360"/>
-            <a:ext cx="4113720" cy="593280"/>
+            <a:ext cx="4113360" cy="592920"/>
           </a:xfrm>
           <a:prstGeom prst="rect">
             <a:avLst/>
@@ -11613,7 +11604,7 @@
         <p:spPr>
           <a:xfrm>
             <a:off x="457200" y="2350080"/>
-            <a:ext cx="3793680" cy="529200"/>
+            <a:ext cx="3793320" cy="528840"/>
           </a:xfrm>
           <a:prstGeom prst="rect">
             <a:avLst/>
@@ -11709,7 +11700,7 @@
         <p:spPr>
           <a:xfrm>
             <a:off x="320040" y="2980800"/>
-            <a:ext cx="4113720" cy="593280"/>
+            <a:ext cx="4113360" cy="592920"/>
           </a:xfrm>
           <a:prstGeom prst="rect">
             <a:avLst/>
@@ -11758,7 +11749,7 @@
         <p:spPr>
           <a:xfrm>
             <a:off x="457200" y="3017520"/>
-            <a:ext cx="3793680" cy="529200"/>
+            <a:ext cx="3793320" cy="528840"/>
           </a:xfrm>
           <a:prstGeom prst="rect">
             <a:avLst/>
@@ -11854,7 +11845,7 @@
         <p:spPr>
           <a:xfrm>
             <a:off x="320040" y="3648600"/>
-            <a:ext cx="4113720" cy="593280"/>
+            <a:ext cx="4113360" cy="592920"/>
           </a:xfrm>
           <a:prstGeom prst="rect">
             <a:avLst/>
@@ -11903,7 +11894,7 @@
         <p:spPr>
           <a:xfrm>
             <a:off x="457200" y="3684960"/>
-            <a:ext cx="3793680" cy="529200"/>
+            <a:ext cx="3793320" cy="528840"/>
           </a:xfrm>
           <a:prstGeom prst="rect">
             <a:avLst/>
@@ -11999,7 +11990,7 @@
         <p:spPr>
           <a:xfrm>
             <a:off x="320040" y="4316040"/>
-            <a:ext cx="4113720" cy="593280"/>
+            <a:ext cx="4113360" cy="592920"/>
           </a:xfrm>
           <a:prstGeom prst="rect">
             <a:avLst/>
@@ -12048,7 +12039,7 @@
         <p:spPr>
           <a:xfrm>
             <a:off x="457200" y="4352400"/>
-            <a:ext cx="3793680" cy="529200"/>
+            <a:ext cx="3793320" cy="528840"/>
           </a:xfrm>
           <a:prstGeom prst="rect">
             <a:avLst/>
@@ -12144,7 +12135,7 @@
         <p:spPr>
           <a:xfrm>
             <a:off x="4709160" y="1051560"/>
-            <a:ext cx="4113720" cy="456120"/>
+            <a:ext cx="4113360" cy="455760"/>
           </a:xfrm>
           <a:prstGeom prst="rect">
             <a:avLst/>
@@ -12193,7 +12184,7 @@
         <p:spPr>
           <a:xfrm>
             <a:off x="4709160" y="1051560"/>
-            <a:ext cx="4113720" cy="456120"/>
+            <a:ext cx="4113360" cy="455760"/>
           </a:xfrm>
           <a:prstGeom prst="rect">
             <a:avLst/>
@@ -12260,7 +12251,7 @@
         <p:spPr>
           <a:xfrm>
             <a:off x="4709160" y="1645920"/>
-            <a:ext cx="4113720" cy="593280"/>
+            <a:ext cx="4113360" cy="592920"/>
           </a:xfrm>
           <a:prstGeom prst="rect">
             <a:avLst/>
@@ -12309,7 +12300,7 @@
         <p:spPr>
           <a:xfrm>
             <a:off x="4846320" y="1682640"/>
-            <a:ext cx="3793680" cy="529200"/>
+            <a:ext cx="3793320" cy="528840"/>
           </a:xfrm>
           <a:prstGeom prst="rect">
             <a:avLst/>
@@ -12405,7 +12396,7 @@
         <p:spPr>
           <a:xfrm>
             <a:off x="4709160" y="2313360"/>
-            <a:ext cx="4113720" cy="593280"/>
+            <a:ext cx="4113360" cy="592920"/>
           </a:xfrm>
           <a:prstGeom prst="rect">
             <a:avLst/>
@@ -12454,7 +12445,7 @@
         <p:spPr>
           <a:xfrm>
             <a:off x="4846320" y="2350080"/>
-            <a:ext cx="3793680" cy="529200"/>
+            <a:ext cx="3793320" cy="528840"/>
           </a:xfrm>
           <a:prstGeom prst="rect">
             <a:avLst/>
@@ -12550,7 +12541,7 @@
         <p:spPr>
           <a:xfrm>
             <a:off x="4709160" y="2980800"/>
-            <a:ext cx="4113720" cy="593280"/>
+            <a:ext cx="4113360" cy="592920"/>
           </a:xfrm>
           <a:prstGeom prst="rect">
             <a:avLst/>
@@ -12599,7 +12590,7 @@
         <p:spPr>
           <a:xfrm>
             <a:off x="4846320" y="3017520"/>
-            <a:ext cx="3793680" cy="529200"/>
+            <a:ext cx="3793320" cy="528840"/>
           </a:xfrm>
           <a:prstGeom prst="rect">
             <a:avLst/>
@@ -12695,7 +12686,7 @@
         <p:spPr>
           <a:xfrm>
             <a:off x="4709160" y="3648600"/>
-            <a:ext cx="4113720" cy="593280"/>
+            <a:ext cx="4113360" cy="592920"/>
           </a:xfrm>
           <a:prstGeom prst="rect">
             <a:avLst/>
@@ -12744,7 +12735,7 @@
         <p:spPr>
           <a:xfrm>
             <a:off x="4846320" y="3684960"/>
-            <a:ext cx="3793680" cy="529200"/>
+            <a:ext cx="3793320" cy="528840"/>
           </a:xfrm>
           <a:prstGeom prst="rect">
             <a:avLst/>
@@ -12840,7 +12831,7 @@
         <p:spPr>
           <a:xfrm>
             <a:off x="4709160" y="4316040"/>
-            <a:ext cx="4113720" cy="593280"/>
+            <a:ext cx="4113360" cy="592920"/>
           </a:xfrm>
           <a:prstGeom prst="rect">
             <a:avLst/>
@@ -12889,7 +12880,7 @@
         <p:spPr>
           <a:xfrm>
             <a:off x="4846320" y="4352400"/>
-            <a:ext cx="3793680" cy="529200"/>
+            <a:ext cx="3793320" cy="528840"/>
           </a:xfrm>
           <a:prstGeom prst="rect">
             <a:avLst/>
@@ -13022,7 +13013,7 @@
         <p:spPr>
           <a:xfrm>
             <a:off x="0" y="0"/>
-            <a:ext cx="9142920" cy="959040"/>
+            <a:ext cx="9142560" cy="958680"/>
           </a:xfrm>
           <a:prstGeom prst="rect">
             <a:avLst/>
@@ -13071,7 +13062,7 @@
         <p:spPr>
           <a:xfrm>
             <a:off x="0" y="960120"/>
-            <a:ext cx="9142920" cy="63000"/>
+            <a:ext cx="9142560" cy="62640"/>
           </a:xfrm>
           <a:prstGeom prst="rect">
             <a:avLst/>
@@ -13120,7 +13111,7 @@
         <p:spPr>
           <a:xfrm>
             <a:off x="411480" y="0"/>
-            <a:ext cx="8319960" cy="959040"/>
+            <a:ext cx="8319600" cy="958680"/>
           </a:xfrm>
           <a:prstGeom prst="rect">
             <a:avLst/>
@@ -13177,7 +13168,7 @@
         <p:spPr>
           <a:xfrm>
             <a:off x="365760" y="1143000"/>
-            <a:ext cx="3656520" cy="346320"/>
+            <a:ext cx="3656160" cy="345960"/>
           </a:xfrm>
           <a:prstGeom prst="rect">
             <a:avLst/>
@@ -13226,7 +13217,7 @@
         <p:spPr>
           <a:xfrm>
             <a:off x="365760" y="1143000"/>
-            <a:ext cx="3656520" cy="346320"/>
+            <a:ext cx="3656160" cy="345960"/>
           </a:xfrm>
           <a:prstGeom prst="rect">
             <a:avLst/>
@@ -13283,7 +13274,7 @@
         <p:spPr>
           <a:xfrm>
             <a:off x="365760" y="1527120"/>
-            <a:ext cx="5028120" cy="273240"/>
+            <a:ext cx="5027760" cy="272880"/>
           </a:xfrm>
           <a:prstGeom prst="rect">
             <a:avLst/>
@@ -13340,7 +13331,7 @@
         <p:spPr>
           <a:xfrm>
             <a:off x="365760" y="1920240"/>
-            <a:ext cx="4205160" cy="867600"/>
+            <a:ext cx="4204800" cy="867240"/>
           </a:xfrm>
           <a:prstGeom prst="rect">
             <a:avLst/>
@@ -13396,7 +13387,7 @@
         <p:spPr>
           <a:xfrm>
             <a:off x="475560" y="2084760"/>
-            <a:ext cx="474480" cy="474480"/>
+            <a:ext cx="474120" cy="474120"/>
           </a:xfrm>
           <a:prstGeom prst="ellipse">
             <a:avLst/>
@@ -13445,7 +13436,7 @@
         <p:spPr>
           <a:xfrm>
             <a:off x="475560" y="2084760"/>
-            <a:ext cx="474480" cy="474480"/>
+            <a:ext cx="474120" cy="474120"/>
           </a:xfrm>
           <a:prstGeom prst="rect">
             <a:avLst/>
@@ -13501,7 +13492,7 @@
         <p:spPr>
           <a:xfrm>
             <a:off x="1051560" y="1993320"/>
-            <a:ext cx="3400560" cy="309960"/>
+            <a:ext cx="3400200" cy="309600"/>
           </a:xfrm>
           <a:prstGeom prst="rect">
             <a:avLst/>
@@ -13558,7 +13549,7 @@
         <p:spPr>
           <a:xfrm>
             <a:off x="1051560" y="2313360"/>
-            <a:ext cx="3400560" cy="410400"/>
+            <a:ext cx="3400200" cy="410040"/>
           </a:xfrm>
           <a:prstGeom prst="rect">
             <a:avLst/>
@@ -13615,7 +13606,7 @@
         <p:spPr>
           <a:xfrm>
             <a:off x="4800600" y="1920240"/>
-            <a:ext cx="4205160" cy="867600"/>
+            <a:ext cx="4204800" cy="867240"/>
           </a:xfrm>
           <a:prstGeom prst="rect">
             <a:avLst/>
@@ -13671,7 +13662,7 @@
         <p:spPr>
           <a:xfrm>
             <a:off x="4910400" y="2084760"/>
-            <a:ext cx="474480" cy="474480"/>
+            <a:ext cx="474120" cy="474120"/>
           </a:xfrm>
           <a:prstGeom prst="ellipse">
             <a:avLst/>
@@ -13720,7 +13711,7 @@
         <p:spPr>
           <a:xfrm>
             <a:off x="4910400" y="2084760"/>
-            <a:ext cx="474480" cy="474480"/>
+            <a:ext cx="474120" cy="474120"/>
           </a:xfrm>
           <a:prstGeom prst="rect">
             <a:avLst/>
@@ -13776,7 +13767,7 @@
         <p:spPr>
           <a:xfrm>
             <a:off x="5486400" y="1993320"/>
-            <a:ext cx="3400560" cy="309960"/>
+            <a:ext cx="3400200" cy="309600"/>
           </a:xfrm>
           <a:prstGeom prst="rect">
             <a:avLst/>
@@ -13833,7 +13824,7 @@
         <p:spPr>
           <a:xfrm>
             <a:off x="5486400" y="2313360"/>
-            <a:ext cx="3400560" cy="410400"/>
+            <a:ext cx="3400200" cy="410040"/>
           </a:xfrm>
           <a:prstGeom prst="rect">
             <a:avLst/>
@@ -13890,7 +13881,7 @@
         <p:spPr>
           <a:xfrm>
             <a:off x="365760" y="2926080"/>
-            <a:ext cx="4205160" cy="867600"/>
+            <a:ext cx="4204800" cy="867240"/>
           </a:xfrm>
           <a:prstGeom prst="rect">
             <a:avLst/>
@@ -13946,7 +13937,7 @@
         <p:spPr>
           <a:xfrm>
             <a:off x="475560" y="3090600"/>
-            <a:ext cx="474480" cy="474480"/>
+            <a:ext cx="474120" cy="474120"/>
           </a:xfrm>
           <a:prstGeom prst="ellipse">
             <a:avLst/>
@@ -13995,7 +13986,7 @@
         <p:spPr>
           <a:xfrm>
             <a:off x="475560" y="3090600"/>
-            <a:ext cx="474480" cy="474480"/>
+            <a:ext cx="474120" cy="474120"/>
           </a:xfrm>
           <a:prstGeom prst="rect">
             <a:avLst/>
@@ -14051,7 +14042,7 @@
         <p:spPr>
           <a:xfrm>
             <a:off x="1051560" y="2999160"/>
-            <a:ext cx="3400560" cy="309960"/>
+            <a:ext cx="3400200" cy="309600"/>
           </a:xfrm>
           <a:prstGeom prst="rect">
             <a:avLst/>
@@ -14108,7 +14099,7 @@
         <p:spPr>
           <a:xfrm>
             <a:off x="1051560" y="3319200"/>
-            <a:ext cx="3400560" cy="410400"/>
+            <a:ext cx="3400200" cy="410040"/>
           </a:xfrm>
           <a:prstGeom prst="rect">
             <a:avLst/>
@@ -14165,7 +14156,7 @@
         <p:spPr>
           <a:xfrm>
             <a:off x="4800600" y="2926080"/>
-            <a:ext cx="4205160" cy="867600"/>
+            <a:ext cx="4204800" cy="867240"/>
           </a:xfrm>
           <a:prstGeom prst="rect">
             <a:avLst/>
@@ -14221,7 +14212,7 @@
         <p:spPr>
           <a:xfrm>
             <a:off x="4910400" y="3090600"/>
-            <a:ext cx="474480" cy="474480"/>
+            <a:ext cx="474120" cy="474120"/>
           </a:xfrm>
           <a:prstGeom prst="ellipse">
             <a:avLst/>
@@ -14270,7 +14261,7 @@
         <p:spPr>
           <a:xfrm>
             <a:off x="4910400" y="3090600"/>
-            <a:ext cx="474480" cy="474480"/>
+            <a:ext cx="474120" cy="474120"/>
           </a:xfrm>
           <a:prstGeom prst="rect">
             <a:avLst/>
@@ -14326,7 +14317,7 @@
         <p:spPr>
           <a:xfrm>
             <a:off x="5486400" y="2999160"/>
-            <a:ext cx="3400560" cy="309960"/>
+            <a:ext cx="3400200" cy="309600"/>
           </a:xfrm>
           <a:prstGeom prst="rect">
             <a:avLst/>
@@ -14383,7 +14374,7 @@
         <p:spPr>
           <a:xfrm>
             <a:off x="5486400" y="3319200"/>
-            <a:ext cx="3400560" cy="410400"/>
+            <a:ext cx="3400200" cy="410040"/>
           </a:xfrm>
           <a:prstGeom prst="rect">
             <a:avLst/>
@@ -14440,7 +14431,7 @@
         <p:spPr>
           <a:xfrm>
             <a:off x="365760" y="3931920"/>
-            <a:ext cx="4205160" cy="867600"/>
+            <a:ext cx="4204800" cy="867240"/>
           </a:xfrm>
           <a:prstGeom prst="rect">
             <a:avLst/>
@@ -14496,7 +14487,7 @@
         <p:spPr>
           <a:xfrm>
             <a:off x="475560" y="4096440"/>
-            <a:ext cx="474480" cy="474480"/>
+            <a:ext cx="474120" cy="474120"/>
           </a:xfrm>
           <a:prstGeom prst="ellipse">
             <a:avLst/>
@@ -14545,7 +14536,7 @@
         <p:spPr>
           <a:xfrm>
             <a:off x="475560" y="4096440"/>
-            <a:ext cx="474480" cy="474480"/>
+            <a:ext cx="474120" cy="474120"/>
           </a:xfrm>
           <a:prstGeom prst="rect">
             <a:avLst/>
@@ -14601,7 +14592,7 @@
         <p:spPr>
           <a:xfrm>
             <a:off x="1051560" y="4005000"/>
-            <a:ext cx="3400560" cy="309960"/>
+            <a:ext cx="3400200" cy="309600"/>
           </a:xfrm>
           <a:prstGeom prst="rect">
             <a:avLst/>
@@ -14658,7 +14649,7 @@
         <p:spPr>
           <a:xfrm>
             <a:off x="1051560" y="4325040"/>
-            <a:ext cx="3400560" cy="410400"/>
+            <a:ext cx="3400200" cy="410040"/>
           </a:xfrm>
           <a:prstGeom prst="rect">
             <a:avLst/>
@@ -14715,7 +14706,7 @@
         <p:spPr>
           <a:xfrm>
             <a:off x="4800600" y="3931920"/>
-            <a:ext cx="4205160" cy="867600"/>
+            <a:ext cx="4204800" cy="867240"/>
           </a:xfrm>
           <a:prstGeom prst="rect">
             <a:avLst/>
@@ -14771,7 +14762,7 @@
         <p:spPr>
           <a:xfrm>
             <a:off x="4910400" y="4096440"/>
-            <a:ext cx="474480" cy="474480"/>
+            <a:ext cx="474120" cy="474120"/>
           </a:xfrm>
           <a:prstGeom prst="ellipse">
             <a:avLst/>
@@ -14820,7 +14811,7 @@
         <p:spPr>
           <a:xfrm>
             <a:off x="4910400" y="4096440"/>
-            <a:ext cx="474480" cy="474480"/>
+            <a:ext cx="474120" cy="474120"/>
           </a:xfrm>
           <a:prstGeom prst="rect">
             <a:avLst/>
@@ -14876,7 +14867,7 @@
         <p:spPr>
           <a:xfrm>
             <a:off x="5486400" y="4005000"/>
-            <a:ext cx="3400560" cy="309960"/>
+            <a:ext cx="3400200" cy="309600"/>
           </a:xfrm>
           <a:prstGeom prst="rect">
             <a:avLst/>
@@ -14933,7 +14924,7 @@
         <p:spPr>
           <a:xfrm>
             <a:off x="5486400" y="4325040"/>
-            <a:ext cx="3400560" cy="410400"/>
+            <a:ext cx="3400200" cy="410040"/>
           </a:xfrm>
           <a:prstGeom prst="rect">
             <a:avLst/>
@@ -15027,7 +15018,7 @@
         <p:spPr>
           <a:xfrm>
             <a:off x="6217920" y="-914400"/>
-            <a:ext cx="4388040" cy="4388040"/>
+            <a:ext cx="4387680" cy="4387680"/>
           </a:xfrm>
           <a:prstGeom prst="ellipse">
             <a:avLst/>
@@ -15076,7 +15067,7 @@
         <p:spPr>
           <a:xfrm>
             <a:off x="-914400" y="3291840"/>
-            <a:ext cx="3199320" cy="3199320"/>
+            <a:ext cx="3198960" cy="3198960"/>
           </a:xfrm>
           <a:prstGeom prst="ellipse">
             <a:avLst/>
@@ -15129,7 +15120,7 @@
         <p:spPr>
           <a:xfrm>
             <a:off x="0" y="0"/>
-            <a:ext cx="181800" cy="5142600"/>
+            <a:ext cx="181440" cy="5142240"/>
           </a:xfrm>
           <a:prstGeom prst="rect">
             <a:avLst/>
@@ -15178,7 +15169,7 @@
         <p:spPr>
           <a:xfrm>
             <a:off x="438840" y="274320"/>
-            <a:ext cx="8228520" cy="593280"/>
+            <a:ext cx="8228160" cy="592920"/>
           </a:xfrm>
           <a:prstGeom prst="rect">
             <a:avLst/>
@@ -15235,7 +15226,7 @@
         <p:spPr>
           <a:xfrm>
             <a:off x="438840" y="868680"/>
-            <a:ext cx="4570920" cy="273240"/>
+            <a:ext cx="4570560" cy="272880"/>
           </a:xfrm>
           <a:prstGeom prst="rect">
             <a:avLst/>
@@ -15292,7 +15283,7 @@
         <p:spPr>
           <a:xfrm>
             <a:off x="438840" y="1398960"/>
-            <a:ext cx="346320" cy="346320"/>
+            <a:ext cx="345960" cy="345960"/>
           </a:xfrm>
           <a:prstGeom prst="ellipse">
             <a:avLst/>
@@ -15341,7 +15332,7 @@
         <p:spPr>
           <a:xfrm>
             <a:off x="438840" y="1398960"/>
-            <a:ext cx="346320" cy="346320"/>
+            <a:ext cx="345960" cy="345960"/>
           </a:xfrm>
           <a:prstGeom prst="rect">
             <a:avLst/>
@@ -15397,7 +15388,7 @@
         <p:spPr>
           <a:xfrm>
             <a:off x="932760" y="1362600"/>
-            <a:ext cx="7771320" cy="456120"/>
+            <a:ext cx="7770960" cy="455760"/>
           </a:xfrm>
           <a:prstGeom prst="rect">
             <a:avLst/>
@@ -15454,7 +15445,7 @@
         <p:spPr>
           <a:xfrm>
             <a:off x="438840" y="1993320"/>
-            <a:ext cx="346320" cy="346320"/>
+            <a:ext cx="345960" cy="345960"/>
           </a:xfrm>
           <a:prstGeom prst="ellipse">
             <a:avLst/>
@@ -15503,7 +15494,7 @@
         <p:spPr>
           <a:xfrm>
             <a:off x="438840" y="1993320"/>
-            <a:ext cx="346320" cy="346320"/>
+            <a:ext cx="345960" cy="345960"/>
           </a:xfrm>
           <a:prstGeom prst="rect">
             <a:avLst/>
@@ -15559,7 +15550,7 @@
         <p:spPr>
           <a:xfrm>
             <a:off x="932760" y="1956960"/>
-            <a:ext cx="7771320" cy="456120"/>
+            <a:ext cx="7770960" cy="455760"/>
           </a:xfrm>
           <a:prstGeom prst="rect">
             <a:avLst/>
@@ -15616,7 +15607,7 @@
         <p:spPr>
           <a:xfrm>
             <a:off x="438840" y="2587680"/>
-            <a:ext cx="346320" cy="346320"/>
+            <a:ext cx="345960" cy="345960"/>
           </a:xfrm>
           <a:prstGeom prst="ellipse">
             <a:avLst/>
@@ -15665,7 +15656,7 @@
         <p:spPr>
           <a:xfrm>
             <a:off x="438840" y="2587680"/>
-            <a:ext cx="346320" cy="346320"/>
+            <a:ext cx="345960" cy="345960"/>
           </a:xfrm>
           <a:prstGeom prst="rect">
             <a:avLst/>
@@ -15721,7 +15712,7 @@
         <p:spPr>
           <a:xfrm>
             <a:off x="932760" y="2551320"/>
-            <a:ext cx="7771320" cy="456120"/>
+            <a:ext cx="7770960" cy="455760"/>
           </a:xfrm>
           <a:prstGeom prst="rect">
             <a:avLst/>
@@ -15778,7 +15769,7 @@
         <p:spPr>
           <a:xfrm>
             <a:off x="438840" y="3182040"/>
-            <a:ext cx="346320" cy="346320"/>
+            <a:ext cx="345960" cy="345960"/>
           </a:xfrm>
           <a:prstGeom prst="ellipse">
             <a:avLst/>
@@ -15827,7 +15818,7 @@
         <p:spPr>
           <a:xfrm>
             <a:off x="438840" y="3182040"/>
-            <a:ext cx="346320" cy="346320"/>
+            <a:ext cx="345960" cy="345960"/>
           </a:xfrm>
           <a:prstGeom prst="rect">
             <a:avLst/>
@@ -15883,7 +15874,7 @@
         <p:spPr>
           <a:xfrm>
             <a:off x="932760" y="3145680"/>
-            <a:ext cx="7771320" cy="456120"/>
+            <a:ext cx="7770960" cy="455760"/>
           </a:xfrm>
           <a:prstGeom prst="rect">
             <a:avLst/>
@@ -15940,7 +15931,7 @@
         <p:spPr>
           <a:xfrm>
             <a:off x="438840" y="3776400"/>
-            <a:ext cx="346320" cy="346320"/>
+            <a:ext cx="345960" cy="345960"/>
           </a:xfrm>
           <a:prstGeom prst="ellipse">
             <a:avLst/>
@@ -15989,7 +15980,7 @@
         <p:spPr>
           <a:xfrm>
             <a:off x="438840" y="3776400"/>
-            <a:ext cx="346320" cy="346320"/>
+            <a:ext cx="345960" cy="345960"/>
           </a:xfrm>
           <a:prstGeom prst="rect">
             <a:avLst/>
@@ -16045,7 +16036,7 @@
         <p:spPr>
           <a:xfrm>
             <a:off x="932760" y="3740040"/>
-            <a:ext cx="7771320" cy="456120"/>
+            <a:ext cx="7770960" cy="455760"/>
           </a:xfrm>
           <a:prstGeom prst="rect">
             <a:avLst/>
@@ -16102,7 +16093,7 @@
         <p:spPr>
           <a:xfrm>
             <a:off x="438840" y="4370760"/>
-            <a:ext cx="346320" cy="346320"/>
+            <a:ext cx="345960" cy="345960"/>
           </a:xfrm>
           <a:prstGeom prst="ellipse">
             <a:avLst/>
@@ -16151,7 +16142,7 @@
         <p:spPr>
           <a:xfrm>
             <a:off x="438840" y="4370760"/>
-            <a:ext cx="346320" cy="346320"/>
+            <a:ext cx="345960" cy="345960"/>
           </a:xfrm>
           <a:prstGeom prst="rect">
             <a:avLst/>
@@ -16207,7 +16198,7 @@
         <p:spPr>
           <a:xfrm>
             <a:off x="932760" y="4334400"/>
-            <a:ext cx="7771320" cy="456120"/>
+            <a:ext cx="7770960" cy="455760"/>
           </a:xfrm>
           <a:prstGeom prst="rect">
             <a:avLst/>
@@ -16264,7 +16255,7 @@
         <p:spPr>
           <a:xfrm>
             <a:off x="438840" y="4645080"/>
-            <a:ext cx="8319960" cy="383040"/>
+            <a:ext cx="8319600" cy="382680"/>
           </a:xfrm>
           <a:prstGeom prst="rect">
             <a:avLst/>
@@ -16313,7 +16304,7 @@
         <p:spPr>
           <a:xfrm>
             <a:off x="438840" y="4645080"/>
-            <a:ext cx="8319960" cy="383040"/>
+            <a:ext cx="8319600" cy="382680"/>
           </a:xfrm>
           <a:prstGeom prst="rect">
             <a:avLst/>
@@ -16350,7 +16341,7 @@
                 <a:latin typeface="Calibri"/>
                 <a:ea typeface="Calibri"/>
               </a:rPr>
-              <a:t>Data is the new oil — and data mining is the refinery  |  investopedia.com</a:t>
+              <a:t>Data is the new oil — and data mining is the refinery  </a:t>
             </a:r>
             <a:endParaRPr b="0" lang="en-US" sz="1200" spc="-1" strike="noStrike">
               <a:solidFill>
